--- a/redes_neurais/slides/cap05_Quickprop.pptx
+++ b/redes_neurais/slides/cap05_Quickprop.pptx
@@ -15,9 +15,15 @@
     <p:sldId id="263" r:id="rId9"/>
     <p:sldId id="264" r:id="rId10"/>
     <p:sldId id="265" r:id="rId11"/>
+    <p:sldId id="266" r:id="rId12"/>
+    <p:sldId id="267" r:id="rId13"/>
+    <p:sldId id="268" r:id="rId14"/>
+    <p:sldId id="269" r:id="rId15"/>
+    <p:sldId id="270" r:id="rId16"/>
+    <p:sldId id="271" r:id="rId17"/>
   </p:sldIdLst>
   <p:notesMasterIdLst>
-    <p:notesMasterId r:id="rId12"/>
+    <p:notesMasterId r:id="rId18"/>
   </p:notesMasterIdLst>
   <p:sldSz cx="9144000" cy="5143500"/>
   <p:notesSz cx="5143500" cy="9144000"/>
@@ -599,7 +605,7 @@
           <a:p>
             <a:r>
               <a:rPr lang="en-US" dirty="0"/>
-              <a:t>Próximo capítulo: abandonar a magnitude e ficar só com o sinal (RPROP).</a:t>
+              <a:t>Verifique o gradiente verdadeiro; o +0,1 é uma modificação do algoritmo de treino, não do gradiente.</a:t>
             </a:r>
             <a:endParaRPr lang="en-US" dirty="0"/>
           </a:p>
@@ -623,6 +629,534 @@
             <a:fld id="{F7021451-1387-4CA6-816F-3879F97B5CBC}" type="slidenum">
               <a:rPr lang="en-US"/>
               <a:t>10</a:t>
+            </a:fld>
+            <a:endParaRPr lang="en-US"/>
+          </a:p>
+        </p:txBody>
+      </p:sp>
+    </p:spTree>
+    <p:extLst>
+      <p:ext uri="{BB962C8B-B14F-4D97-AF65-F5344CB8AC3E}">
+        <p14:creationId xmlns:p14="http://schemas.microsoft.com/office/powerpoint/2010/main" val="1024086991"/>
+      </p:ext>
+    </p:extLst>
+  </p:cSld>
+  <p:clrMapOvr>
+    <a:masterClrMapping/>
+  </p:clrMapOvr>
+</p:notes>
+</file>
+
+<file path=ppt/notesSlides/notesSlide11.xml><?xml version="1.0" encoding="utf-8"?>
+<p:notes xmlns:a="http://schemas.openxmlformats.org/drawingml/2006/main" xmlns:r="http://schemas.openxmlformats.org/officeDocument/2006/relationships" xmlns:p="http://schemas.openxmlformats.org/presentationml/2006/main">
+  <p:cSld>
+    <p:spTree>
+      <p:nvGrpSpPr>
+        <p:cNvPr id="1" name=""/>
+        <p:cNvGrpSpPr/>
+        <p:nvPr/>
+      </p:nvGrpSpPr>
+      <p:grpSpPr>
+        <a:xfrm>
+          <a:off x="0" y="0"/>
+          <a:ext cx="0" cy="0"/>
+          <a:chOff x="0" y="0"/>
+          <a:chExt cx="0" cy="0"/>
+        </a:xfrm>
+      </p:grpSpPr>
+      <p:sp>
+        <p:nvSpPr>
+          <p:cNvPr id="2" name="Slide Image Placeholder 1"/>
+          <p:cNvSpPr>
+            <a:spLocks noGrp="1" noRot="1" noChangeAspect="1"/>
+          </p:cNvSpPr>
+          <p:nvPr>
+            <p:ph type="sldImg"/>
+          </p:nvPr>
+        </p:nvSpPr>
+        <p:spPr/>
+      </p:sp>
+      <p:sp>
+        <p:nvSpPr>
+          <p:cNvPr id="3" name="Notes Placeholder 2"/>
+          <p:cNvSpPr>
+            <a:spLocks noGrp="1"/>
+          </p:cNvSpPr>
+          <p:nvPr>
+            <p:ph type="body" idx="1"/>
+          </p:nvPr>
+        </p:nvSpPr>
+        <p:spPr/>
+        <p:txBody>
+          <a:bodyPr/>
+          <a:lstStyle/>
+          <a:p>
+            <a:r>
+              <a:rPr lang="en-US" dirty="0"/>
+              <a:t>Resultado do livro (XOR, artifício +0,1): 20/30 sementes convergiram contra 18/30, em 63 épocas contra 3000.</a:t>
+            </a:r>
+            <a:endParaRPr lang="en-US" dirty="0"/>
+          </a:p>
+        </p:txBody>
+      </p:sp>
+      <p:sp>
+        <p:nvSpPr>
+          <p:cNvPr id="4" name="Slide Number Placeholder 3"/>
+          <p:cNvSpPr>
+            <a:spLocks noGrp="1"/>
+          </p:cNvSpPr>
+          <p:nvPr>
+            <p:ph type="sldNum" sz="quarter" idx="10"/>
+          </p:nvPr>
+        </p:nvSpPr>
+        <p:spPr/>
+        <p:txBody>
+          <a:bodyPr/>
+          <a:lstStyle/>
+          <a:p>
+            <a:fld id="{F7021451-1387-4CA6-816F-3879F97B5CBC}" type="slidenum">
+              <a:rPr lang="en-US"/>
+              <a:t>11</a:t>
+            </a:fld>
+            <a:endParaRPr lang="en-US"/>
+          </a:p>
+        </p:txBody>
+      </p:sp>
+    </p:spTree>
+    <p:extLst>
+      <p:ext uri="{BB962C8B-B14F-4D97-AF65-F5344CB8AC3E}">
+        <p14:creationId xmlns:p14="http://schemas.microsoft.com/office/powerpoint/2010/main" val="1024086991"/>
+      </p:ext>
+    </p:extLst>
+  </p:cSld>
+  <p:clrMapOvr>
+    <a:masterClrMapping/>
+  </p:clrMapOvr>
+</p:notes>
+</file>
+
+<file path=ppt/notesSlides/notesSlide12.xml><?xml version="1.0" encoding="utf-8"?>
+<p:notes xmlns:a="http://schemas.openxmlformats.org/drawingml/2006/main" xmlns:r="http://schemas.openxmlformats.org/officeDocument/2006/relationships" xmlns:p="http://schemas.openxmlformats.org/presentationml/2006/main">
+  <p:cSld>
+    <p:spTree>
+      <p:nvGrpSpPr>
+        <p:cNvPr id="1" name=""/>
+        <p:cNvGrpSpPr/>
+        <p:nvPr/>
+      </p:nvGrpSpPr>
+      <p:grpSpPr>
+        <a:xfrm>
+          <a:off x="0" y="0"/>
+          <a:ext cx="0" cy="0"/>
+          <a:chOff x="0" y="0"/>
+          <a:chExt cx="0" cy="0"/>
+        </a:xfrm>
+      </p:grpSpPr>
+      <p:sp>
+        <p:nvSpPr>
+          <p:cNvPr id="2" name="Slide Image Placeholder 1"/>
+          <p:cNvSpPr>
+            <a:spLocks noGrp="1" noRot="1" noChangeAspect="1"/>
+          </p:cNvSpPr>
+          <p:nvPr>
+            <p:ph type="sldImg"/>
+          </p:nvPr>
+        </p:nvSpPr>
+        <p:spPr/>
+      </p:sp>
+      <p:sp>
+        <p:nvSpPr>
+          <p:cNvPr id="3" name="Notes Placeholder 2"/>
+          <p:cNvSpPr>
+            <a:spLocks noGrp="1"/>
+          </p:cNvSpPr>
+          <p:nvPr>
+            <p:ph type="body" idx="1"/>
+          </p:nvPr>
+        </p:nvSpPr>
+        <p:spPr/>
+        <p:txBody>
+          <a:bodyPr/>
+          <a:lstStyle/>
+          <a:p>
+            <a:r>
+              <a:rPr lang="en-US" dirty="0"/>
+              <a:t>Resposta: A) Limitar o tamanho do salto. |Δw(t)| ≤ μ|Δw(t−1)| evita saltos gigantes. Dê um minuto para votação antes de revelar.</a:t>
+            </a:r>
+            <a:endParaRPr lang="en-US" dirty="0"/>
+          </a:p>
+        </p:txBody>
+      </p:sp>
+      <p:sp>
+        <p:nvSpPr>
+          <p:cNvPr id="4" name="Slide Number Placeholder 3"/>
+          <p:cNvSpPr>
+            <a:spLocks noGrp="1"/>
+          </p:cNvSpPr>
+          <p:nvPr>
+            <p:ph type="sldNum" sz="quarter" idx="10"/>
+          </p:nvPr>
+        </p:nvSpPr>
+        <p:spPr/>
+        <p:txBody>
+          <a:bodyPr/>
+          <a:lstStyle/>
+          <a:p>
+            <a:fld id="{F7021451-1387-4CA6-816F-3879F97B5CBC}" type="slidenum">
+              <a:rPr lang="en-US"/>
+              <a:t>12</a:t>
+            </a:fld>
+            <a:endParaRPr lang="en-US"/>
+          </a:p>
+        </p:txBody>
+      </p:sp>
+    </p:spTree>
+    <p:extLst>
+      <p:ext uri="{BB962C8B-B14F-4D97-AF65-F5344CB8AC3E}">
+        <p14:creationId xmlns:p14="http://schemas.microsoft.com/office/powerpoint/2010/main" val="1024086991"/>
+      </p:ext>
+    </p:extLst>
+  </p:cSld>
+  <p:clrMapOvr>
+    <a:masterClrMapping/>
+  </p:clrMapOvr>
+</p:notes>
+</file>
+
+<file path=ppt/notesSlides/notesSlide13.xml><?xml version="1.0" encoding="utf-8"?>
+<p:notes xmlns:a="http://schemas.openxmlformats.org/drawingml/2006/main" xmlns:r="http://schemas.openxmlformats.org/officeDocument/2006/relationships" xmlns:p="http://schemas.openxmlformats.org/presentationml/2006/main">
+  <p:cSld>
+    <p:spTree>
+      <p:nvGrpSpPr>
+        <p:cNvPr id="1" name=""/>
+        <p:cNvGrpSpPr/>
+        <p:nvPr/>
+      </p:nvGrpSpPr>
+      <p:grpSpPr>
+        <a:xfrm>
+          <a:off x="0" y="0"/>
+          <a:ext cx="0" cy="0"/>
+          <a:chOff x="0" y="0"/>
+          <a:chExt cx="0" cy="0"/>
+        </a:xfrm>
+      </p:grpSpPr>
+      <p:sp>
+        <p:nvSpPr>
+          <p:cNvPr id="2" name="Slide Image Placeholder 1"/>
+          <p:cNvSpPr>
+            <a:spLocks noGrp="1" noRot="1" noChangeAspect="1"/>
+          </p:cNvSpPr>
+          <p:nvPr>
+            <p:ph type="sldImg"/>
+          </p:nvPr>
+        </p:nvSpPr>
+        <p:spPr/>
+      </p:sp>
+      <p:sp>
+        <p:nvSpPr>
+          <p:cNvPr id="3" name="Notes Placeholder 2"/>
+          <p:cNvSpPr>
+            <a:spLocks noGrp="1"/>
+          </p:cNvSpPr>
+          <p:nvPr>
+            <p:ph type="body" idx="1"/>
+          </p:nvPr>
+        </p:nvSpPr>
+        <p:spPr/>
+        <p:txBody>
+          <a:bodyPr/>
+          <a:lstStyle/>
+          <a:p>
+            <a:r>
+              <a:rPr lang="en-US" dirty="0"/>
+              <a:t>Resposta: A) Por secante, peso a peso. Duas derivadas consecutivas definem uma reta; seu zero dá o passo. Dê um minuto para votação antes de revelar.</a:t>
+            </a:r>
+            <a:endParaRPr lang="en-US" dirty="0"/>
+          </a:p>
+        </p:txBody>
+      </p:sp>
+      <p:sp>
+        <p:nvSpPr>
+          <p:cNvPr id="4" name="Slide Number Placeholder 3"/>
+          <p:cNvSpPr>
+            <a:spLocks noGrp="1"/>
+          </p:cNvSpPr>
+          <p:nvPr>
+            <p:ph type="sldNum" sz="quarter" idx="10"/>
+          </p:nvPr>
+        </p:nvSpPr>
+        <p:spPr/>
+        <p:txBody>
+          <a:bodyPr/>
+          <a:lstStyle/>
+          <a:p>
+            <a:fld id="{F7021451-1387-4CA6-816F-3879F97B5CBC}" type="slidenum">
+              <a:rPr lang="en-US"/>
+              <a:t>13</a:t>
+            </a:fld>
+            <a:endParaRPr lang="en-US"/>
+          </a:p>
+        </p:txBody>
+      </p:sp>
+    </p:spTree>
+    <p:extLst>
+      <p:ext uri="{BB962C8B-B14F-4D97-AF65-F5344CB8AC3E}">
+        <p14:creationId xmlns:p14="http://schemas.microsoft.com/office/powerpoint/2010/main" val="1024086991"/>
+      </p:ext>
+    </p:extLst>
+  </p:cSld>
+  <p:clrMapOvr>
+    <a:masterClrMapping/>
+  </p:clrMapOvr>
+</p:notes>
+</file>
+
+<file path=ppt/notesSlides/notesSlide14.xml><?xml version="1.0" encoding="utf-8"?>
+<p:notes xmlns:a="http://schemas.openxmlformats.org/drawingml/2006/main" xmlns:r="http://schemas.openxmlformats.org/officeDocument/2006/relationships" xmlns:p="http://schemas.openxmlformats.org/presentationml/2006/main">
+  <p:cSld>
+    <p:spTree>
+      <p:nvGrpSpPr>
+        <p:cNvPr id="1" name=""/>
+        <p:cNvGrpSpPr/>
+        <p:nvPr/>
+      </p:nvGrpSpPr>
+      <p:grpSpPr>
+        <a:xfrm>
+          <a:off x="0" y="0"/>
+          <a:ext cx="0" cy="0"/>
+          <a:chOff x="0" y="0"/>
+          <a:chExt cx="0" cy="0"/>
+        </a:xfrm>
+      </p:grpSpPr>
+      <p:sp>
+        <p:nvSpPr>
+          <p:cNvPr id="2" name="Slide Image Placeholder 1"/>
+          <p:cNvSpPr>
+            <a:spLocks noGrp="1" noRot="1" noChangeAspect="1"/>
+          </p:cNvSpPr>
+          <p:nvPr>
+            <p:ph type="sldImg"/>
+          </p:nvPr>
+        </p:nvSpPr>
+        <p:spPr/>
+      </p:sp>
+      <p:sp>
+        <p:nvSpPr>
+          <p:cNvPr id="3" name="Notes Placeholder 2"/>
+          <p:cNvSpPr>
+            <a:spLocks noGrp="1"/>
+          </p:cNvSpPr>
+          <p:nvPr>
+            <p:ph type="body" idx="1"/>
+          </p:nvPr>
+        </p:nvSpPr>
+        <p:spPr/>
+        <p:txBody>
+          <a:bodyPr/>
+          <a:lstStyle/>
+          <a:p>
+            <a:r>
+              <a:rPr lang="en-US" dirty="0"/>
+              <a:t>S(0) = −4, S(1) = −3, Δw(0) = 0,5: Δw(1) = S(1)/(S(0) − S(1)) · Δw(0) = 1,5, que chega a w = 2 (exato, pois E é parábola). O limite μ|Δw(0)| = 0,875 corta o passo para 0,875; sem o limite, seriam 1,5.</a:t>
+            </a:r>
+            <a:endParaRPr lang="en-US" dirty="0"/>
+          </a:p>
+        </p:txBody>
+      </p:sp>
+      <p:sp>
+        <p:nvSpPr>
+          <p:cNvPr id="4" name="Slide Number Placeholder 3"/>
+          <p:cNvSpPr>
+            <a:spLocks noGrp="1"/>
+          </p:cNvSpPr>
+          <p:nvPr>
+            <p:ph type="sldNum" sz="quarter" idx="10"/>
+          </p:nvPr>
+        </p:nvSpPr>
+        <p:spPr/>
+        <p:txBody>
+          <a:bodyPr/>
+          <a:lstStyle/>
+          <a:p>
+            <a:fld id="{F7021451-1387-4CA6-816F-3879F97B5CBC}" type="slidenum">
+              <a:rPr lang="en-US"/>
+              <a:t>14</a:t>
+            </a:fld>
+            <a:endParaRPr lang="en-US"/>
+          </a:p>
+        </p:txBody>
+      </p:sp>
+    </p:spTree>
+    <p:extLst>
+      <p:ext uri="{BB962C8B-B14F-4D97-AF65-F5344CB8AC3E}">
+        <p14:creationId xmlns:p14="http://schemas.microsoft.com/office/powerpoint/2010/main" val="1024086991"/>
+      </p:ext>
+    </p:extLst>
+  </p:cSld>
+  <p:clrMapOvr>
+    <a:masterClrMapping/>
+  </p:clrMapOvr>
+</p:notes>
+</file>
+
+<file path=ppt/notesSlides/notesSlide15.xml><?xml version="1.0" encoding="utf-8"?>
+<p:notes xmlns:a="http://schemas.openxmlformats.org/drawingml/2006/main" xmlns:r="http://schemas.openxmlformats.org/officeDocument/2006/relationships" xmlns:p="http://schemas.openxmlformats.org/presentationml/2006/main">
+  <p:cSld>
+    <p:spTree>
+      <p:nvGrpSpPr>
+        <p:cNvPr id="1" name=""/>
+        <p:cNvGrpSpPr/>
+        <p:nvPr/>
+      </p:nvGrpSpPr>
+      <p:grpSpPr>
+        <a:xfrm>
+          <a:off x="0" y="0"/>
+          <a:ext cx="0" cy="0"/>
+          <a:chOff x="0" y="0"/>
+          <a:chExt cx="0" cy="0"/>
+        </a:xfrm>
+      </p:grpSpPr>
+      <p:sp>
+        <p:nvSpPr>
+          <p:cNvPr id="2" name="Slide Image Placeholder 1"/>
+          <p:cNvSpPr>
+            <a:spLocks noGrp="1" noRot="1" noChangeAspect="1"/>
+          </p:cNvSpPr>
+          <p:nvPr>
+            <p:ph type="sldImg"/>
+          </p:nvPr>
+        </p:nvSpPr>
+        <p:spPr/>
+      </p:sp>
+      <p:sp>
+        <p:nvSpPr>
+          <p:cNvPr id="3" name="Notes Placeholder 2"/>
+          <p:cNvSpPr>
+            <a:spLocks noGrp="1"/>
+          </p:cNvSpPr>
+          <p:nvPr>
+            <p:ph type="body" idx="1"/>
+          </p:nvPr>
+        </p:nvSpPr>
+        <p:spPr/>
+        <p:txBody>
+          <a:bodyPr/>
+          <a:lstStyle/>
+          <a:p>
+            <a:r>
+              <a:rPr lang="en-US" dirty="0"/>
+              <a:t>Próximo capítulo: abandonar a magnitude e ficar só com o sinal (RPROP).</a:t>
+            </a:r>
+            <a:endParaRPr lang="en-US" dirty="0"/>
+          </a:p>
+        </p:txBody>
+      </p:sp>
+      <p:sp>
+        <p:nvSpPr>
+          <p:cNvPr id="4" name="Slide Number Placeholder 3"/>
+          <p:cNvSpPr>
+            <a:spLocks noGrp="1"/>
+          </p:cNvSpPr>
+          <p:nvPr>
+            <p:ph type="sldNum" sz="quarter" idx="10"/>
+          </p:nvPr>
+        </p:nvSpPr>
+        <p:spPr/>
+        <p:txBody>
+          <a:bodyPr/>
+          <a:lstStyle/>
+          <a:p>
+            <a:fld id="{F7021451-1387-4CA6-816F-3879F97B5CBC}" type="slidenum">
+              <a:rPr lang="en-US"/>
+              <a:t>15</a:t>
+            </a:fld>
+            <a:endParaRPr lang="en-US"/>
+          </a:p>
+        </p:txBody>
+      </p:sp>
+    </p:spTree>
+    <p:extLst>
+      <p:ext uri="{BB962C8B-B14F-4D97-AF65-F5344CB8AC3E}">
+        <p14:creationId xmlns:p14="http://schemas.microsoft.com/office/powerpoint/2010/main" val="1024086991"/>
+      </p:ext>
+    </p:extLst>
+  </p:cSld>
+  <p:clrMapOvr>
+    <a:masterClrMapping/>
+  </p:clrMapOvr>
+</p:notes>
+</file>
+
+<file path=ppt/notesSlides/notesSlide16.xml><?xml version="1.0" encoding="utf-8"?>
+<p:notes xmlns:a="http://schemas.openxmlformats.org/drawingml/2006/main" xmlns:r="http://schemas.openxmlformats.org/officeDocument/2006/relationships" xmlns:p="http://schemas.openxmlformats.org/presentationml/2006/main">
+  <p:cSld>
+    <p:spTree>
+      <p:nvGrpSpPr>
+        <p:cNvPr id="1" name=""/>
+        <p:cNvGrpSpPr/>
+        <p:nvPr/>
+      </p:nvGrpSpPr>
+      <p:grpSpPr>
+        <a:xfrm>
+          <a:off x="0" y="0"/>
+          <a:ext cx="0" cy="0"/>
+          <a:chOff x="0" y="0"/>
+          <a:chExt cx="0" cy="0"/>
+        </a:xfrm>
+      </p:grpSpPr>
+      <p:sp>
+        <p:nvSpPr>
+          <p:cNvPr id="2" name="Slide Image Placeholder 1"/>
+          <p:cNvSpPr>
+            <a:spLocks noGrp="1" noRot="1" noChangeAspect="1"/>
+          </p:cNvSpPr>
+          <p:nvPr>
+            <p:ph type="sldImg"/>
+          </p:nvPr>
+        </p:nvSpPr>
+        <p:spPr/>
+      </p:sp>
+      <p:sp>
+        <p:nvSpPr>
+          <p:cNvPr id="3" name="Notes Placeholder 2"/>
+          <p:cNvSpPr>
+            <a:spLocks noGrp="1"/>
+          </p:cNvSpPr>
+          <p:nvPr>
+            <p:ph type="body" idx="1"/>
+          </p:nvPr>
+        </p:nvSpPr>
+        <p:spPr/>
+        <p:txBody>
+          <a:bodyPr/>
+          <a:lstStyle/>
+          <a:p>
+            <a:r>
+              <a:rPr lang="en-US" dirty="0"/>
+              <a:t>Feche com a frase e peça que os estudantes a expliquem com as próprias palavras.</a:t>
+            </a:r>
+            <a:endParaRPr lang="en-US" dirty="0"/>
+          </a:p>
+        </p:txBody>
+      </p:sp>
+      <p:sp>
+        <p:nvSpPr>
+          <p:cNvPr id="4" name="Slide Number Placeholder 3"/>
+          <p:cNvSpPr>
+            <a:spLocks noGrp="1"/>
+          </p:cNvSpPr>
+          <p:nvPr>
+            <p:ph type="sldNum" sz="quarter" idx="10"/>
+          </p:nvPr>
+        </p:nvSpPr>
+        <p:spPr/>
+        <p:txBody>
+          <a:bodyPr/>
+          <a:lstStyle/>
+          <a:p>
+            <a:fld id="{F7021451-1387-4CA6-816F-3879F97B5CBC}" type="slidenum">
+              <a:rPr lang="en-US"/>
+              <a:t>16</a:t>
             </a:fld>
             <a:endParaRPr lang="en-US"/>
           </a:p>
@@ -687,7 +1221,7 @@
           <a:p>
             <a:r>
               <a:rPr lang="en-US" dirty="0"/>
-              <a:t>Analogia: em vez de descer degrau por degrau, você estima onde o vale termina e vai direto.</a:t>
+              <a:t>Apresente o roteiro e o tempo estimado de cada bloco (cerca de 2 minutos por slide).</a:t>
             </a:r>
             <a:endParaRPr lang="en-US" dirty="0"/>
           </a:p>
@@ -775,7 +1309,7 @@
           <a:p>
             <a:r>
               <a:rPr lang="en-US" dirty="0"/>
-              <a:t>Considere a derivada E′ como função do peso: aproximada por uma reta (secante), cujo zero é o mínimo da parábola.</a:t>
+              <a:t>Analogia: em vez de descer degrau por degrau, você estima onde o vale termina e vai direto.</a:t>
             </a:r>
             <a:endParaRPr lang="en-US" dirty="0"/>
           </a:p>
@@ -863,7 +1397,7 @@
           <a:p>
             <a:r>
               <a:rPr lang="en-US" dirty="0"/>
-              <a:t>O limite μ evita saltos gigantes quando a secante é quase plana. Explique o caso em que S(t) tem o mesmo sinal e módulo maior.</a:t>
+              <a:t>Considere a derivada E′ como função do peso: aproximada por uma reta (secante), cujo zero é o mínimo da parábola.</a:t>
             </a:r>
             <a:endParaRPr lang="en-US" dirty="0"/>
           </a:p>
@@ -951,7 +1485,7 @@
           <a:p>
             <a:r>
               <a:rPr lang="en-US" dirty="0"/>
-              <a:t>O artifício +0,1 evita platôs da sigmoide (derivada quase nula nas pontas). No livro: XOR 18→20/30 sementes e épocas 3000→63 com o artifício.</a:t>
+              <a:t>Peça que expliquem por que o limite μ é necessário quando a secante é quase plana.</a:t>
             </a:r>
             <a:endParaRPr lang="en-US" dirty="0"/>
           </a:p>
@@ -1039,7 +1573,7 @@
           <a:p>
             <a:r>
               <a:rPr lang="en-US" dirty="0"/>
-              <a:t>Resultado do livro: erro final mediano 0,0190 (Quickprop) contra 0,0811 (GD) neste problema. Não é uma afirmação universal.</a:t>
+              <a:t>O limite μ evita saltos gigantes quando a secante é quase plana. Explique o caso em que S(t) tem o mesmo sinal e módulo maior.</a:t>
             </a:r>
             <a:endParaRPr lang="en-US" dirty="0"/>
           </a:p>
@@ -1127,7 +1661,7 @@
           <a:p>
             <a:r>
               <a:rPr lang="en-US" dirty="0"/>
-              <a:t>Mensagem: o ganho de velocidade vem acompanhado de mais ajustes. Registre sempre a busca feita.</a:t>
+              <a:t>O artifício +0,1 evita platôs da sigmoide (derivada quase nula nas pontas). No livro: XOR 18→20/30 sementes e épocas 3000→63 com o artifício.</a:t>
             </a:r>
             <a:endParaRPr lang="en-US" dirty="0"/>
           </a:p>
@@ -1215,7 +1749,7 @@
           <a:p>
             <a:r>
               <a:rPr lang="en-US" dirty="0"/>
-              <a:t>Verifique o gradiente verdadeiro; o +0,1 é uma modificação do algoritmo de treino, não do gradiente.</a:t>
+              <a:t>Resultado do livro: erro final mediano 0,0190 (Quickprop) contra 0,0811 (GD) neste problema. Não é uma afirmação universal.</a:t>
             </a:r>
             <a:endParaRPr lang="en-US" dirty="0"/>
           </a:p>
@@ -1303,7 +1837,7 @@
           <a:p>
             <a:r>
               <a:rPr lang="en-US" dirty="0"/>
-              <a:t>S(0) = −4, S(1) = −3, Δw(0) = 0,5: Δw(1) = S(1)/(S(0) − S(1)) · Δw(0) = 1,5, que chega a w = 2 (exato, pois E é parábola). O limite μ|Δw(0)| = 0,875 corta o passo para 0,875; sem o limite, seriam 1,5.</a:t>
+              <a:t>Mensagem: o ganho de velocidade vem acompanhado de mais ajustes. Registre sempre a busca feita.</a:t>
             </a:r>
             <a:endParaRPr lang="en-US" dirty="0"/>
           </a:p>
@@ -2085,6 +2619,1468 @@
         </p:nvSpPr>
         <p:spPr>
           <a:xfrm>
+            <a:off x="365760" y="109728"/>
+            <a:ext cx="8412480" cy="658368"/>
+          </a:xfrm>
+          <a:prstGeom prst="rect">
+            <a:avLst/>
+          </a:prstGeom>
+          <a:noFill/>
+          <a:ln/>
+        </p:spPr>
+        <p:txBody>
+          <a:bodyPr wrap="square" lIns="0" tIns="0" rIns="0" bIns="0" rtlCol="0" anchor="ctr">
+            <a:normAutofit/>
+          </a:bodyPr>
+          <a:lstStyle/>
+          <a:p>
+            <a:pPr indent="0" marL="0">
+              <a:buNone/>
+            </a:pPr>
+            <a:r>
+              <a:rPr lang="en-US" sz="2600" b="1" dirty="0">
+                <a:solidFill>
+                  <a:srgbClr val="FFFFFF"/>
+                </a:solidFill>
+                <a:latin typeface="Calibri" pitchFamily="34" charset="0"/>
+                <a:ea typeface="Calibri" pitchFamily="34" charset="-122"/>
+                <a:cs typeface="Calibri" pitchFamily="34" charset="-120"/>
+              </a:rPr>
+              <a:t>Erros frequentes</a:t>
+            </a:r>
+            <a:endParaRPr lang="en-US" sz="2600" dirty="0"/>
+          </a:p>
+        </p:txBody>
+      </p:sp>
+      <p:sp>
+        <p:nvSpPr>
+          <p:cNvPr id="3" name="Text 1"/>
+          <p:cNvSpPr txBox="1"/>
+          <p:nvPr/>
+        </p:nvSpPr>
+        <p:spPr>
+          <a:xfrm>
+            <a:off x="548640" y="1188720"/>
+            <a:ext cx="8046720" cy="3383280"/>
+          </a:xfrm>
+          <a:prstGeom prst="rect">
+            <a:avLst/>
+          </a:prstGeom>
+          <a:noFill/>
+          <a:ln/>
+        </p:spPr>
+        <p:txBody>
+          <a:bodyPr wrap="square" lIns="0" tIns="0" rIns="0" bIns="0" rtlCol="0" anchor="t">
+            <a:normAutofit/>
+          </a:bodyPr>
+          <a:lstStyle/>
+          <a:p>
+            <a:pPr marL="342900" indent="-342900">
+              <a:spcAft>
+                <a:spcPts val="1400"/>
+              </a:spcAft>
+              <a:buSzPct val="100000"/>
+              <a:buChar char="•"/>
+            </a:pPr>
+            <a:r>
+              <a:rPr lang="en-US" sz="2400" dirty="0">
+                <a:solidFill>
+                  <a:srgbClr val="1F2937"/>
+                </a:solidFill>
+              </a:rPr>
+              <a:t>Dividir por zero quando S(t) = S(t−1)</a:t>
+            </a:r>
+            <a:endParaRPr lang="en-US" sz="2400" dirty="0"/>
+          </a:p>
+          <a:p>
+            <a:pPr marL="342900" indent="-342900">
+              <a:spcAft>
+                <a:spcPts val="1400"/>
+              </a:spcAft>
+              <a:buSzPct val="100000"/>
+              <a:buChar char="•"/>
+            </a:pPr>
+            <a:r>
+              <a:rPr lang="en-US" sz="2400" dirty="0">
+                <a:solidFill>
+                  <a:srgbClr val="1F2937"/>
+                </a:solidFill>
+              </a:rPr>
+              <a:t>Esquecer o limite μ</a:t>
+            </a:r>
+            <a:endParaRPr lang="en-US" sz="2400" dirty="0"/>
+          </a:p>
+          <a:p>
+            <a:pPr marL="342900" indent="-342900">
+              <a:spcAft>
+                <a:spcPts val="1400"/>
+              </a:spcAft>
+              <a:buSzPct val="100000"/>
+              <a:buChar char="•"/>
+            </a:pPr>
+            <a:r>
+              <a:rPr lang="en-US" sz="2400" dirty="0">
+                <a:solidFill>
+                  <a:srgbClr val="1F2937"/>
+                </a:solidFill>
+              </a:rPr>
+              <a:t>Comparar com GD sem ajustar a taxa do GD</a:t>
+            </a:r>
+            <a:endParaRPr lang="en-US" sz="2400" dirty="0"/>
+          </a:p>
+          <a:p>
+            <a:pPr marL="342900" indent="-342900">
+              <a:spcAft>
+                <a:spcPts val="1400"/>
+              </a:spcAft>
+              <a:buSzPct val="100000"/>
+              <a:buChar char="•"/>
+            </a:pPr>
+            <a:r>
+              <a:rPr lang="en-US" sz="2400" dirty="0">
+                <a:solidFill>
+                  <a:srgbClr val="1F2937"/>
+                </a:solidFill>
+              </a:rPr>
+              <a:t>Aplicar o artifício +0,1 à derivada usada na verificação de gradiente</a:t>
+            </a:r>
+            <a:endParaRPr lang="en-US" sz="2400" dirty="0"/>
+          </a:p>
+        </p:txBody>
+      </p:sp>
+      <p:sp>
+        <p:nvSpPr>
+          <p:cNvPr id="25" name="Slide Number Placeholder 0"/>
+          <p:cNvSpPr>
+            <a:spLocks noGrp="1"/>
+          </p:cNvSpPr>
+          <p:nvPr>
+            <p:ph type="sldNum" sz="quarter" idx="4294967295"/>
+          </p:nvPr>
+        </p:nvSpPr>
+        <p:spPr>
+          <a:xfrm>
+            <a:off x="8412480" y="4828032"/>
+            <a:ext cx="457200" cy="228600"/>
+          </a:xfrm>
+          <a:prstGeom prst="rect">
+            <a:avLst/>
+          </a:prstGeom>
+          <a:extLst>
+            <a:ext uri="{C572A759-6A51-4108-AA02-DFA0A04FC94B}">
+              <ma14:wrappingTextBoxFlag xmlns:ma14="http://schemas.microsoft.com/office/mac/drawingml/2011/main" val="0"/>
+            </a:ext>
+          </a:extLst>
+        </p:spPr>
+        <p:txBody>
+          <a:bodyPr/>
+          <a:lstStyle>
+            <a:lvl1pPr>
+              <a:defRPr sz="900">
+                <a:solidFill>
+                  <a:srgbClr val="6B7280"/>
+                </a:solidFill>
+              </a:defRPr>
+            </a:lvl1pPr>
+          </a:lstStyle>
+          <a:p>
+            <a:pPr algn="l"/>
+            <a:fld id="{F7021451-1387-4CA6-816F-3879F97B5CBC}" type="slidenum">
+              <a:rPr b="0" lang="en-US"/>
+              <a:t>10</a:t>
+            </a:fld>
+            <a:endParaRPr lang="en-US"/>
+          </a:p>
+        </p:txBody>
+      </p:sp>
+    </p:spTree>
+  </p:cSld>
+  <p:clrMapOvr>
+    <a:masterClrMapping/>
+  </p:clrMapOvr>
+</p:sld>
+</file>
+
+<file path=ppt/slides/slide11.xml><?xml version="1.0" encoding="utf-8"?>
+<p:sld xmlns:a="http://schemas.openxmlformats.org/drawingml/2006/main" xmlns:r="http://schemas.openxmlformats.org/officeDocument/2006/relationships" xmlns:p="http://schemas.openxmlformats.org/presentationml/2006/main">
+  <p:cSld name="Slide 11">
+    <p:spTree>
+      <p:nvGrpSpPr>
+        <p:cNvPr id="1" name=""/>
+        <p:cNvGrpSpPr/>
+        <p:nvPr/>
+      </p:nvGrpSpPr>
+      <p:grpSpPr>
+        <a:xfrm>
+          <a:off x="0" y="0"/>
+          <a:ext cx="0" cy="0"/>
+          <a:chOff x="0" y="0"/>
+          <a:chExt cx="0" cy="0"/>
+        </a:xfrm>
+      </p:grpSpPr>
+      <p:sp>
+        <p:nvSpPr>
+          <p:cNvPr id="2" name="Text 0"/>
+          <p:cNvSpPr txBox="1"/>
+          <p:nvPr/>
+        </p:nvSpPr>
+        <p:spPr>
+          <a:xfrm>
+            <a:off x="365760" y="109728"/>
+            <a:ext cx="8412480" cy="658368"/>
+          </a:xfrm>
+          <a:prstGeom prst="rect">
+            <a:avLst/>
+          </a:prstGeom>
+          <a:noFill/>
+          <a:ln/>
+        </p:spPr>
+        <p:txBody>
+          <a:bodyPr wrap="square" lIns="0" tIns="0" rIns="0" bIns="0" rtlCol="0" anchor="ctr">
+            <a:normAutofit/>
+          </a:bodyPr>
+          <a:lstStyle/>
+          <a:p>
+            <a:pPr indent="0" marL="0">
+              <a:buNone/>
+            </a:pPr>
+            <a:r>
+              <a:rPr lang="en-US" sz="2600" b="1" dirty="0">
+                <a:solidFill>
+                  <a:srgbClr val="FFFFFF"/>
+                </a:solidFill>
+                <a:latin typeface="Calibri" pitchFamily="34" charset="0"/>
+                <a:ea typeface="Calibri" pitchFamily="34" charset="-122"/>
+                <a:cs typeface="Calibri" pitchFamily="34" charset="-120"/>
+              </a:rPr>
+              <a:t>Quickprop em 5 passos</a:t>
+            </a:r>
+            <a:endParaRPr lang="en-US" sz="2600" dirty="0"/>
+          </a:p>
+        </p:txBody>
+      </p:sp>
+      <p:sp>
+        <p:nvSpPr>
+          <p:cNvPr id="3" name="Text 1"/>
+          <p:cNvSpPr txBox="1"/>
+          <p:nvPr/>
+        </p:nvSpPr>
+        <p:spPr>
+          <a:xfrm>
+            <a:off x="548640" y="1188720"/>
+            <a:ext cx="8046720" cy="3383280"/>
+          </a:xfrm>
+          <a:prstGeom prst="rect">
+            <a:avLst/>
+          </a:prstGeom>
+          <a:noFill/>
+          <a:ln/>
+        </p:spPr>
+        <p:txBody>
+          <a:bodyPr wrap="square" lIns="0" tIns="0" rIns="0" bIns="0" rtlCol="0" anchor="t">
+            <a:normAutofit/>
+          </a:bodyPr>
+          <a:lstStyle/>
+          <a:p>
+            <a:pPr marL="342900" indent="-342900">
+              <a:spcAft>
+                <a:spcPts val="1400"/>
+              </a:spcAft>
+              <a:buSzPct val="100000"/>
+              <a:buChar char="•"/>
+            </a:pPr>
+            <a:r>
+              <a:rPr lang="en-US" sz="2400" dirty="0">
+                <a:solidFill>
+                  <a:srgbClr val="1F2937"/>
+                </a:solidFill>
+              </a:rPr>
+              <a:t>1. Calcule a derivada S(t) de cada peso</a:t>
+            </a:r>
+            <a:endParaRPr lang="en-US" sz="2400" dirty="0"/>
+          </a:p>
+          <a:p>
+            <a:pPr marL="342900" indent="-342900">
+              <a:spcAft>
+                <a:spcPts val="1400"/>
+              </a:spcAft>
+              <a:buSzPct val="100000"/>
+              <a:buChar char="•"/>
+            </a:pPr>
+            <a:r>
+              <a:rPr lang="en-US" sz="2400" dirty="0">
+                <a:solidFill>
+                  <a:srgbClr val="1F2937"/>
+                </a:solidFill>
+              </a:rPr>
+              <a:t>2. Compare com S(t−1) e o passo anterior</a:t>
+            </a:r>
+            <a:endParaRPr lang="en-US" sz="2400" dirty="0"/>
+          </a:p>
+          <a:p>
+            <a:pPr marL="342900" indent="-342900">
+              <a:spcAft>
+                <a:spcPts val="1400"/>
+              </a:spcAft>
+              <a:buSzPct val="100000"/>
+              <a:buChar char="•"/>
+            </a:pPr>
+            <a:r>
+              <a:rPr lang="en-US" sz="2400" dirty="0">
+                <a:solidFill>
+                  <a:srgbClr val="1F2937"/>
+                </a:solidFill>
+              </a:rPr>
+              <a:t>3. Passo = S/(S₋ − S) · Δw₋</a:t>
+            </a:r>
+            <a:endParaRPr lang="en-US" sz="2400" dirty="0"/>
+          </a:p>
+          <a:p>
+            <a:pPr marL="342900" indent="-342900">
+              <a:spcAft>
+                <a:spcPts val="1400"/>
+              </a:spcAft>
+              <a:buSzPct val="100000"/>
+              <a:buChar char="•"/>
+            </a:pPr>
+            <a:r>
+              <a:rPr lang="en-US" sz="2400" dirty="0">
+                <a:solidFill>
+                  <a:srgbClr val="1F2937"/>
+                </a:solidFill>
+              </a:rPr>
+              <a:t>4. Limite o salto a μ|Δw₋| (μ = 1,75)</a:t>
+            </a:r>
+            <a:endParaRPr lang="en-US" sz="2400" dirty="0"/>
+          </a:p>
+          <a:p>
+            <a:pPr marL="342900" indent="-342900">
+              <a:spcAft>
+                <a:spcPts val="1400"/>
+              </a:spcAft>
+              <a:buSzPct val="100000"/>
+              <a:buChar char="•"/>
+            </a:pPr>
+            <a:r>
+              <a:rPr lang="en-US" sz="2400" dirty="0">
+                <a:solidFill>
+                  <a:srgbClr val="1F2937"/>
+                </a:solidFill>
+              </a:rPr>
+              <a:t>5. Se o passo anterior for nulo, use um passo de gradiente</a:t>
+            </a:r>
+            <a:endParaRPr lang="en-US" sz="2400" dirty="0"/>
+          </a:p>
+        </p:txBody>
+      </p:sp>
+      <p:sp>
+        <p:nvSpPr>
+          <p:cNvPr id="25" name="Slide Number Placeholder 0"/>
+          <p:cNvSpPr>
+            <a:spLocks noGrp="1"/>
+          </p:cNvSpPr>
+          <p:nvPr>
+            <p:ph type="sldNum" sz="quarter" idx="4294967295"/>
+          </p:nvPr>
+        </p:nvSpPr>
+        <p:spPr>
+          <a:xfrm>
+            <a:off x="8412480" y="4828032"/>
+            <a:ext cx="457200" cy="228600"/>
+          </a:xfrm>
+          <a:prstGeom prst="rect">
+            <a:avLst/>
+          </a:prstGeom>
+          <a:extLst>
+            <a:ext uri="{C572A759-6A51-4108-AA02-DFA0A04FC94B}">
+              <ma14:wrappingTextBoxFlag xmlns:ma14="http://schemas.microsoft.com/office/mac/drawingml/2011/main" val="0"/>
+            </a:ext>
+          </a:extLst>
+        </p:spPr>
+        <p:txBody>
+          <a:bodyPr/>
+          <a:lstStyle>
+            <a:lvl1pPr>
+              <a:defRPr sz="900">
+                <a:solidFill>
+                  <a:srgbClr val="6B7280"/>
+                </a:solidFill>
+              </a:defRPr>
+            </a:lvl1pPr>
+          </a:lstStyle>
+          <a:p>
+            <a:pPr algn="l"/>
+            <a:fld id="{F7021451-1387-4CA6-816F-3879F97B5CBC}" type="slidenum">
+              <a:rPr b="0" lang="en-US"/>
+              <a:t>11</a:t>
+            </a:fld>
+            <a:endParaRPr lang="en-US"/>
+          </a:p>
+        </p:txBody>
+      </p:sp>
+    </p:spTree>
+  </p:cSld>
+  <p:clrMapOvr>
+    <a:masterClrMapping/>
+  </p:clrMapOvr>
+</p:sld>
+</file>
+
+<file path=ppt/slides/slide12.xml><?xml version="1.0" encoding="utf-8"?>
+<p:sld xmlns:a="http://schemas.openxmlformats.org/drawingml/2006/main" xmlns:r="http://schemas.openxmlformats.org/officeDocument/2006/relationships" xmlns:p="http://schemas.openxmlformats.org/presentationml/2006/main">
+  <p:cSld name="Slide 12">
+    <p:spTree>
+      <p:nvGrpSpPr>
+        <p:cNvPr id="1" name=""/>
+        <p:cNvGrpSpPr/>
+        <p:nvPr/>
+      </p:nvGrpSpPr>
+      <p:grpSpPr>
+        <a:xfrm>
+          <a:off x="0" y="0"/>
+          <a:ext cx="0" cy="0"/>
+          <a:chOff x="0" y="0"/>
+          <a:chExt cx="0" cy="0"/>
+        </a:xfrm>
+      </p:grpSpPr>
+      <p:sp>
+        <p:nvSpPr>
+          <p:cNvPr id="2" name="Text 0"/>
+          <p:cNvSpPr txBox="1"/>
+          <p:nvPr/>
+        </p:nvSpPr>
+        <p:spPr>
+          <a:xfrm>
+            <a:off x="365760" y="109728"/>
+            <a:ext cx="8412480" cy="658368"/>
+          </a:xfrm>
+          <a:prstGeom prst="rect">
+            <a:avLst/>
+          </a:prstGeom>
+          <a:noFill/>
+          <a:ln/>
+        </p:spPr>
+        <p:txBody>
+          <a:bodyPr wrap="square" lIns="0" tIns="0" rIns="0" bIns="0" rtlCol="0" anchor="ctr">
+            <a:normAutofit/>
+          </a:bodyPr>
+          <a:lstStyle/>
+          <a:p>
+            <a:pPr indent="0" marL="0">
+              <a:buNone/>
+            </a:pPr>
+            <a:r>
+              <a:rPr lang="en-US" sz="2600" b="1" dirty="0">
+                <a:solidFill>
+                  <a:srgbClr val="FFFFFF"/>
+                </a:solidFill>
+                <a:latin typeface="Calibri" pitchFamily="34" charset="0"/>
+                <a:ea typeface="Calibri" pitchFamily="34" charset="-122"/>
+                <a:cs typeface="Calibri" pitchFamily="34" charset="-120"/>
+              </a:rPr>
+              <a:t>Quiz relâmpago 1</a:t>
+            </a:r>
+            <a:endParaRPr lang="en-US" sz="2600" dirty="0"/>
+          </a:p>
+        </p:txBody>
+      </p:sp>
+      <p:sp>
+        <p:nvSpPr>
+          <p:cNvPr id="3" name="Text 1"/>
+          <p:cNvSpPr txBox="1"/>
+          <p:nvPr/>
+        </p:nvSpPr>
+        <p:spPr>
+          <a:xfrm>
+            <a:off x="548640" y="1051560"/>
+            <a:ext cx="8046720" cy="822960"/>
+          </a:xfrm>
+          <a:prstGeom prst="rect">
+            <a:avLst/>
+          </a:prstGeom>
+          <a:noFill/>
+          <a:ln/>
+        </p:spPr>
+        <p:txBody>
+          <a:bodyPr wrap="square" lIns="0" tIns="0" rIns="0" bIns="0" rtlCol="0" anchor="ctr">
+            <a:normAutofit/>
+          </a:bodyPr>
+          <a:lstStyle/>
+          <a:p>
+            <a:pPr indent="0" marL="0">
+              <a:buNone/>
+            </a:pPr>
+            <a:r>
+              <a:rPr lang="en-US" sz="2200" b="1" dirty="0">
+                <a:solidFill>
+                  <a:srgbClr val="312E81"/>
+                </a:solidFill>
+              </a:rPr>
+              <a:t>Qual é o papel do fator μ = 1,75 no Quickprop?</a:t>
+            </a:r>
+            <a:endParaRPr lang="en-US" sz="2200" dirty="0"/>
+          </a:p>
+        </p:txBody>
+      </p:sp>
+      <p:sp>
+        <p:nvSpPr>
+          <p:cNvPr id="4" name="Shape 2"/>
+          <p:cNvSpPr/>
+          <p:nvPr/>
+        </p:nvSpPr>
+        <p:spPr>
+          <a:xfrm>
+            <a:off x="548640" y="1965960"/>
+            <a:ext cx="8046720" cy="548640"/>
+          </a:xfrm>
+          <a:prstGeom prst="roundRect">
+            <a:avLst>
+              <a:gd name="adj" fmla="val 13333"/>
+            </a:avLst>
+          </a:prstGeom>
+          <a:solidFill>
+            <a:srgbClr val="EEF2FF"/>
+          </a:solidFill>
+          <a:ln w="12700">
+            <a:solidFill>
+              <a:srgbClr val="C7D2FE"/>
+            </a:solidFill>
+            <a:prstDash val="solid"/>
+          </a:ln>
+        </p:spPr>
+      </p:sp>
+      <p:sp>
+        <p:nvSpPr>
+          <p:cNvPr id="5" name="Text 3"/>
+          <p:cNvSpPr txBox="1"/>
+          <p:nvPr/>
+        </p:nvSpPr>
+        <p:spPr>
+          <a:xfrm>
+            <a:off x="777240" y="1965960"/>
+            <a:ext cx="7680960" cy="548640"/>
+          </a:xfrm>
+          <a:prstGeom prst="rect">
+            <a:avLst/>
+          </a:prstGeom>
+          <a:noFill/>
+          <a:ln/>
+        </p:spPr>
+        <p:txBody>
+          <a:bodyPr wrap="square" lIns="0" tIns="0" rIns="0" bIns="0" rtlCol="0" anchor="ctr">
+            <a:normAutofit/>
+          </a:bodyPr>
+          <a:lstStyle/>
+          <a:p>
+            <a:pPr indent="0" marL="0">
+              <a:buNone/>
+            </a:pPr>
+            <a:r>
+              <a:rPr lang="en-US" sz="1800" dirty="0">
+                <a:solidFill>
+                  <a:srgbClr val="1F2937"/>
+                </a:solidFill>
+              </a:rPr>
+              <a:t>A)  Limitar o tamanho do salto</a:t>
+            </a:r>
+            <a:endParaRPr lang="en-US" sz="1800" dirty="0"/>
+          </a:p>
+        </p:txBody>
+      </p:sp>
+      <p:sp>
+        <p:nvSpPr>
+          <p:cNvPr id="6" name="Shape 4"/>
+          <p:cNvSpPr/>
+          <p:nvPr/>
+        </p:nvSpPr>
+        <p:spPr>
+          <a:xfrm>
+            <a:off x="548640" y="2606040"/>
+            <a:ext cx="8046720" cy="548640"/>
+          </a:xfrm>
+          <a:prstGeom prst="roundRect">
+            <a:avLst>
+              <a:gd name="adj" fmla="val 13333"/>
+            </a:avLst>
+          </a:prstGeom>
+          <a:solidFill>
+            <a:srgbClr val="EEF2FF"/>
+          </a:solidFill>
+          <a:ln w="12700">
+            <a:solidFill>
+              <a:srgbClr val="C7D2FE"/>
+            </a:solidFill>
+            <a:prstDash val="solid"/>
+          </a:ln>
+        </p:spPr>
+      </p:sp>
+      <p:sp>
+        <p:nvSpPr>
+          <p:cNvPr id="7" name="Text 5"/>
+          <p:cNvSpPr txBox="1"/>
+          <p:nvPr/>
+        </p:nvSpPr>
+        <p:spPr>
+          <a:xfrm>
+            <a:off x="777240" y="2606040"/>
+            <a:ext cx="7680960" cy="548640"/>
+          </a:xfrm>
+          <a:prstGeom prst="rect">
+            <a:avLst/>
+          </a:prstGeom>
+          <a:noFill/>
+          <a:ln/>
+        </p:spPr>
+        <p:txBody>
+          <a:bodyPr wrap="square" lIns="0" tIns="0" rIns="0" bIns="0" rtlCol="0" anchor="ctr">
+            <a:normAutofit/>
+          </a:bodyPr>
+          <a:lstStyle/>
+          <a:p>
+            <a:pPr indent="0" marL="0">
+              <a:buNone/>
+            </a:pPr>
+            <a:r>
+              <a:rPr lang="en-US" sz="1800" dirty="0">
+                <a:solidFill>
+                  <a:srgbClr val="1F2937"/>
+                </a:solidFill>
+              </a:rPr>
+              <a:t>B)  Definir a taxa inicial</a:t>
+            </a:r>
+            <a:endParaRPr lang="en-US" sz="1800" dirty="0"/>
+          </a:p>
+        </p:txBody>
+      </p:sp>
+      <p:sp>
+        <p:nvSpPr>
+          <p:cNvPr id="8" name="Shape 6"/>
+          <p:cNvSpPr/>
+          <p:nvPr/>
+        </p:nvSpPr>
+        <p:spPr>
+          <a:xfrm>
+            <a:off x="548640" y="3246120"/>
+            <a:ext cx="8046720" cy="548640"/>
+          </a:xfrm>
+          <a:prstGeom prst="roundRect">
+            <a:avLst>
+              <a:gd name="adj" fmla="val 13333"/>
+            </a:avLst>
+          </a:prstGeom>
+          <a:solidFill>
+            <a:srgbClr val="EEF2FF"/>
+          </a:solidFill>
+          <a:ln w="12700">
+            <a:solidFill>
+              <a:srgbClr val="C7D2FE"/>
+            </a:solidFill>
+            <a:prstDash val="solid"/>
+          </a:ln>
+        </p:spPr>
+      </p:sp>
+      <p:sp>
+        <p:nvSpPr>
+          <p:cNvPr id="9" name="Text 7"/>
+          <p:cNvSpPr txBox="1"/>
+          <p:nvPr/>
+        </p:nvSpPr>
+        <p:spPr>
+          <a:xfrm>
+            <a:off x="777240" y="3246120"/>
+            <a:ext cx="7680960" cy="548640"/>
+          </a:xfrm>
+          <a:prstGeom prst="rect">
+            <a:avLst/>
+          </a:prstGeom>
+          <a:noFill/>
+          <a:ln/>
+        </p:spPr>
+        <p:txBody>
+          <a:bodyPr wrap="square" lIns="0" tIns="0" rIns="0" bIns="0" rtlCol="0" anchor="ctr">
+            <a:normAutofit/>
+          </a:bodyPr>
+          <a:lstStyle/>
+          <a:p>
+            <a:pPr indent="0" marL="0">
+              <a:buNone/>
+            </a:pPr>
+            <a:r>
+              <a:rPr lang="en-US" sz="1800" dirty="0">
+                <a:solidFill>
+                  <a:srgbClr val="1F2937"/>
+                </a:solidFill>
+              </a:rPr>
+              <a:t>C)  Escolher a função de ativação</a:t>
+            </a:r>
+            <a:endParaRPr lang="en-US" sz="1800" dirty="0"/>
+          </a:p>
+        </p:txBody>
+      </p:sp>
+      <p:sp>
+        <p:nvSpPr>
+          <p:cNvPr id="10" name="Shape 8"/>
+          <p:cNvSpPr/>
+          <p:nvPr/>
+        </p:nvSpPr>
+        <p:spPr>
+          <a:xfrm>
+            <a:off x="548640" y="3886200"/>
+            <a:ext cx="8046720" cy="548640"/>
+          </a:xfrm>
+          <a:prstGeom prst="roundRect">
+            <a:avLst>
+              <a:gd name="adj" fmla="val 13333"/>
+            </a:avLst>
+          </a:prstGeom>
+          <a:solidFill>
+            <a:srgbClr val="EEF2FF"/>
+          </a:solidFill>
+          <a:ln w="12700">
+            <a:solidFill>
+              <a:srgbClr val="C7D2FE"/>
+            </a:solidFill>
+            <a:prstDash val="solid"/>
+          </a:ln>
+        </p:spPr>
+      </p:sp>
+      <p:sp>
+        <p:nvSpPr>
+          <p:cNvPr id="11" name="Text 9"/>
+          <p:cNvSpPr txBox="1"/>
+          <p:nvPr/>
+        </p:nvSpPr>
+        <p:spPr>
+          <a:xfrm>
+            <a:off x="777240" y="3886200"/>
+            <a:ext cx="7680960" cy="548640"/>
+          </a:xfrm>
+          <a:prstGeom prst="rect">
+            <a:avLst/>
+          </a:prstGeom>
+          <a:noFill/>
+          <a:ln/>
+        </p:spPr>
+        <p:txBody>
+          <a:bodyPr wrap="square" lIns="0" tIns="0" rIns="0" bIns="0" rtlCol="0" anchor="ctr">
+            <a:normAutofit/>
+          </a:bodyPr>
+          <a:lstStyle/>
+          <a:p>
+            <a:pPr indent="0" marL="0">
+              <a:buNone/>
+            </a:pPr>
+            <a:r>
+              <a:rPr lang="en-US" sz="1800" dirty="0">
+                <a:solidFill>
+                  <a:srgbClr val="1F2937"/>
+                </a:solidFill>
+              </a:rPr>
+              <a:t>D)  Zerar o gradiente</a:t>
+            </a:r>
+            <a:endParaRPr lang="en-US" sz="1800" dirty="0"/>
+          </a:p>
+        </p:txBody>
+      </p:sp>
+      <p:sp>
+        <p:nvSpPr>
+          <p:cNvPr id="25" name="Slide Number Placeholder 0"/>
+          <p:cNvSpPr>
+            <a:spLocks noGrp="1"/>
+          </p:cNvSpPr>
+          <p:nvPr>
+            <p:ph type="sldNum" sz="quarter" idx="4294967295"/>
+          </p:nvPr>
+        </p:nvSpPr>
+        <p:spPr>
+          <a:xfrm>
+            <a:off x="8412480" y="4828032"/>
+            <a:ext cx="457200" cy="228600"/>
+          </a:xfrm>
+          <a:prstGeom prst="rect">
+            <a:avLst/>
+          </a:prstGeom>
+          <a:extLst>
+            <a:ext uri="{C572A759-6A51-4108-AA02-DFA0A04FC94B}">
+              <ma14:wrappingTextBoxFlag xmlns:ma14="http://schemas.microsoft.com/office/mac/drawingml/2011/main" val="0"/>
+            </a:ext>
+          </a:extLst>
+        </p:spPr>
+        <p:txBody>
+          <a:bodyPr/>
+          <a:lstStyle>
+            <a:lvl1pPr>
+              <a:defRPr sz="900">
+                <a:solidFill>
+                  <a:srgbClr val="6B7280"/>
+                </a:solidFill>
+              </a:defRPr>
+            </a:lvl1pPr>
+          </a:lstStyle>
+          <a:p>
+            <a:pPr algn="l"/>
+            <a:fld id="{F7021451-1387-4CA6-816F-3879F97B5CBC}" type="slidenum">
+              <a:rPr b="0" lang="en-US"/>
+              <a:t>12</a:t>
+            </a:fld>
+            <a:endParaRPr lang="en-US"/>
+          </a:p>
+        </p:txBody>
+      </p:sp>
+    </p:spTree>
+  </p:cSld>
+  <p:clrMapOvr>
+    <a:masterClrMapping/>
+  </p:clrMapOvr>
+</p:sld>
+</file>
+
+<file path=ppt/slides/slide13.xml><?xml version="1.0" encoding="utf-8"?>
+<p:sld xmlns:a="http://schemas.openxmlformats.org/drawingml/2006/main" xmlns:r="http://schemas.openxmlformats.org/officeDocument/2006/relationships" xmlns:p="http://schemas.openxmlformats.org/presentationml/2006/main">
+  <p:cSld name="Slide 13">
+    <p:spTree>
+      <p:nvGrpSpPr>
+        <p:cNvPr id="1" name=""/>
+        <p:cNvGrpSpPr/>
+        <p:nvPr/>
+      </p:nvGrpSpPr>
+      <p:grpSpPr>
+        <a:xfrm>
+          <a:off x="0" y="0"/>
+          <a:ext cx="0" cy="0"/>
+          <a:chOff x="0" y="0"/>
+          <a:chExt cx="0" cy="0"/>
+        </a:xfrm>
+      </p:grpSpPr>
+      <p:sp>
+        <p:nvSpPr>
+          <p:cNvPr id="2" name="Text 0"/>
+          <p:cNvSpPr txBox="1"/>
+          <p:nvPr/>
+        </p:nvSpPr>
+        <p:spPr>
+          <a:xfrm>
+            <a:off x="365760" y="109728"/>
+            <a:ext cx="8412480" cy="658368"/>
+          </a:xfrm>
+          <a:prstGeom prst="rect">
+            <a:avLst/>
+          </a:prstGeom>
+          <a:noFill/>
+          <a:ln/>
+        </p:spPr>
+        <p:txBody>
+          <a:bodyPr wrap="square" lIns="0" tIns="0" rIns="0" bIns="0" rtlCol="0" anchor="ctr">
+            <a:normAutofit/>
+          </a:bodyPr>
+          <a:lstStyle/>
+          <a:p>
+            <a:pPr indent="0" marL="0">
+              <a:buNone/>
+            </a:pPr>
+            <a:r>
+              <a:rPr lang="en-US" sz="2600" b="1" dirty="0">
+                <a:solidFill>
+                  <a:srgbClr val="FFFFFF"/>
+                </a:solidFill>
+                <a:latin typeface="Calibri" pitchFamily="34" charset="0"/>
+                <a:ea typeface="Calibri" pitchFamily="34" charset="-122"/>
+                <a:cs typeface="Calibri" pitchFamily="34" charset="-120"/>
+              </a:rPr>
+              <a:t>Quiz relâmpago 2</a:t>
+            </a:r>
+            <a:endParaRPr lang="en-US" sz="2600" dirty="0"/>
+          </a:p>
+        </p:txBody>
+      </p:sp>
+      <p:sp>
+        <p:nvSpPr>
+          <p:cNvPr id="3" name="Text 1"/>
+          <p:cNvSpPr txBox="1"/>
+          <p:nvPr/>
+        </p:nvSpPr>
+        <p:spPr>
+          <a:xfrm>
+            <a:off x="548640" y="1051560"/>
+            <a:ext cx="8046720" cy="822960"/>
+          </a:xfrm>
+          <a:prstGeom prst="rect">
+            <a:avLst/>
+          </a:prstGeom>
+          <a:noFill/>
+          <a:ln/>
+        </p:spPr>
+        <p:txBody>
+          <a:bodyPr wrap="square" lIns="0" tIns="0" rIns="0" bIns="0" rtlCol="0" anchor="ctr">
+            <a:normAutofit/>
+          </a:bodyPr>
+          <a:lstStyle/>
+          <a:p>
+            <a:pPr indent="0" marL="0">
+              <a:buNone/>
+            </a:pPr>
+            <a:r>
+              <a:rPr lang="en-US" sz="2200" b="1" dirty="0">
+                <a:solidFill>
+                  <a:srgbClr val="312E81"/>
+                </a:solidFill>
+              </a:rPr>
+              <a:t>O Quickprop estima a curvatura:</a:t>
+            </a:r>
+            <a:endParaRPr lang="en-US" sz="2200" dirty="0"/>
+          </a:p>
+        </p:txBody>
+      </p:sp>
+      <p:sp>
+        <p:nvSpPr>
+          <p:cNvPr id="4" name="Shape 2"/>
+          <p:cNvSpPr/>
+          <p:nvPr/>
+        </p:nvSpPr>
+        <p:spPr>
+          <a:xfrm>
+            <a:off x="548640" y="1965960"/>
+            <a:ext cx="8046720" cy="548640"/>
+          </a:xfrm>
+          <a:prstGeom prst="roundRect">
+            <a:avLst>
+              <a:gd name="adj" fmla="val 13333"/>
+            </a:avLst>
+          </a:prstGeom>
+          <a:solidFill>
+            <a:srgbClr val="EEF2FF"/>
+          </a:solidFill>
+          <a:ln w="12700">
+            <a:solidFill>
+              <a:srgbClr val="C7D2FE"/>
+            </a:solidFill>
+            <a:prstDash val="solid"/>
+          </a:ln>
+        </p:spPr>
+      </p:sp>
+      <p:sp>
+        <p:nvSpPr>
+          <p:cNvPr id="5" name="Text 3"/>
+          <p:cNvSpPr txBox="1"/>
+          <p:nvPr/>
+        </p:nvSpPr>
+        <p:spPr>
+          <a:xfrm>
+            <a:off x="777240" y="1965960"/>
+            <a:ext cx="7680960" cy="548640"/>
+          </a:xfrm>
+          <a:prstGeom prst="rect">
+            <a:avLst/>
+          </a:prstGeom>
+          <a:noFill/>
+          <a:ln/>
+        </p:spPr>
+        <p:txBody>
+          <a:bodyPr wrap="square" lIns="0" tIns="0" rIns="0" bIns="0" rtlCol="0" anchor="ctr">
+            <a:normAutofit/>
+          </a:bodyPr>
+          <a:lstStyle/>
+          <a:p>
+            <a:pPr indent="0" marL="0">
+              <a:buNone/>
+            </a:pPr>
+            <a:r>
+              <a:rPr lang="en-US" sz="1800" dirty="0">
+                <a:solidFill>
+                  <a:srgbClr val="1F2937"/>
+                </a:solidFill>
+              </a:rPr>
+              <a:t>A)  Por secante, peso a peso</a:t>
+            </a:r>
+            <a:endParaRPr lang="en-US" sz="1800" dirty="0"/>
+          </a:p>
+        </p:txBody>
+      </p:sp>
+      <p:sp>
+        <p:nvSpPr>
+          <p:cNvPr id="6" name="Shape 4"/>
+          <p:cNvSpPr/>
+          <p:nvPr/>
+        </p:nvSpPr>
+        <p:spPr>
+          <a:xfrm>
+            <a:off x="548640" y="2606040"/>
+            <a:ext cx="8046720" cy="548640"/>
+          </a:xfrm>
+          <a:prstGeom prst="roundRect">
+            <a:avLst>
+              <a:gd name="adj" fmla="val 13333"/>
+            </a:avLst>
+          </a:prstGeom>
+          <a:solidFill>
+            <a:srgbClr val="EEF2FF"/>
+          </a:solidFill>
+          <a:ln w="12700">
+            <a:solidFill>
+              <a:srgbClr val="C7D2FE"/>
+            </a:solidFill>
+            <a:prstDash val="solid"/>
+          </a:ln>
+        </p:spPr>
+      </p:sp>
+      <p:sp>
+        <p:nvSpPr>
+          <p:cNvPr id="7" name="Text 5"/>
+          <p:cNvSpPr txBox="1"/>
+          <p:nvPr/>
+        </p:nvSpPr>
+        <p:spPr>
+          <a:xfrm>
+            <a:off x="777240" y="2606040"/>
+            <a:ext cx="7680960" cy="548640"/>
+          </a:xfrm>
+          <a:prstGeom prst="rect">
+            <a:avLst/>
+          </a:prstGeom>
+          <a:noFill/>
+          <a:ln/>
+        </p:spPr>
+        <p:txBody>
+          <a:bodyPr wrap="square" lIns="0" tIns="0" rIns="0" bIns="0" rtlCol="0" anchor="ctr">
+            <a:normAutofit/>
+          </a:bodyPr>
+          <a:lstStyle/>
+          <a:p>
+            <a:pPr indent="0" marL="0">
+              <a:buNone/>
+            </a:pPr>
+            <a:r>
+              <a:rPr lang="en-US" sz="1800" dirty="0">
+                <a:solidFill>
+                  <a:srgbClr val="1F2937"/>
+                </a:solidFill>
+              </a:rPr>
+              <a:t>B)  Calculando a Hessiana inteira</a:t>
+            </a:r>
+            <a:endParaRPr lang="en-US" sz="1800" dirty="0"/>
+          </a:p>
+        </p:txBody>
+      </p:sp>
+      <p:sp>
+        <p:nvSpPr>
+          <p:cNvPr id="8" name="Shape 6"/>
+          <p:cNvSpPr/>
+          <p:nvPr/>
+        </p:nvSpPr>
+        <p:spPr>
+          <a:xfrm>
+            <a:off x="548640" y="3246120"/>
+            <a:ext cx="8046720" cy="548640"/>
+          </a:xfrm>
+          <a:prstGeom prst="roundRect">
+            <a:avLst>
+              <a:gd name="adj" fmla="val 13333"/>
+            </a:avLst>
+          </a:prstGeom>
+          <a:solidFill>
+            <a:srgbClr val="EEF2FF"/>
+          </a:solidFill>
+          <a:ln w="12700">
+            <a:solidFill>
+              <a:srgbClr val="C7D2FE"/>
+            </a:solidFill>
+            <a:prstDash val="solid"/>
+          </a:ln>
+        </p:spPr>
+      </p:sp>
+      <p:sp>
+        <p:nvSpPr>
+          <p:cNvPr id="9" name="Text 7"/>
+          <p:cNvSpPr txBox="1"/>
+          <p:nvPr/>
+        </p:nvSpPr>
+        <p:spPr>
+          <a:xfrm>
+            <a:off x="777240" y="3246120"/>
+            <a:ext cx="7680960" cy="548640"/>
+          </a:xfrm>
+          <a:prstGeom prst="rect">
+            <a:avLst/>
+          </a:prstGeom>
+          <a:noFill/>
+          <a:ln/>
+        </p:spPr>
+        <p:txBody>
+          <a:bodyPr wrap="square" lIns="0" tIns="0" rIns="0" bIns="0" rtlCol="0" anchor="ctr">
+            <a:normAutofit/>
+          </a:bodyPr>
+          <a:lstStyle/>
+          <a:p>
+            <a:pPr indent="0" marL="0">
+              <a:buNone/>
+            </a:pPr>
+            <a:r>
+              <a:rPr lang="en-US" sz="1800" dirty="0">
+                <a:solidFill>
+                  <a:srgbClr val="1F2937"/>
+                </a:solidFill>
+              </a:rPr>
+              <a:t>C)  Com diferenças centrais da perda</a:t>
+            </a:r>
+            <a:endParaRPr lang="en-US" sz="1800" dirty="0"/>
+          </a:p>
+        </p:txBody>
+      </p:sp>
+      <p:sp>
+        <p:nvSpPr>
+          <p:cNvPr id="10" name="Shape 8"/>
+          <p:cNvSpPr/>
+          <p:nvPr/>
+        </p:nvSpPr>
+        <p:spPr>
+          <a:xfrm>
+            <a:off x="548640" y="3886200"/>
+            <a:ext cx="8046720" cy="548640"/>
+          </a:xfrm>
+          <a:prstGeom prst="roundRect">
+            <a:avLst>
+              <a:gd name="adj" fmla="val 13333"/>
+            </a:avLst>
+          </a:prstGeom>
+          <a:solidFill>
+            <a:srgbClr val="EEF2FF"/>
+          </a:solidFill>
+          <a:ln w="12700">
+            <a:solidFill>
+              <a:srgbClr val="C7D2FE"/>
+            </a:solidFill>
+            <a:prstDash val="solid"/>
+          </a:ln>
+        </p:spPr>
+      </p:sp>
+      <p:sp>
+        <p:nvSpPr>
+          <p:cNvPr id="11" name="Text 9"/>
+          <p:cNvSpPr txBox="1"/>
+          <p:nvPr/>
+        </p:nvSpPr>
+        <p:spPr>
+          <a:xfrm>
+            <a:off x="777240" y="3886200"/>
+            <a:ext cx="7680960" cy="548640"/>
+          </a:xfrm>
+          <a:prstGeom prst="rect">
+            <a:avLst/>
+          </a:prstGeom>
+          <a:noFill/>
+          <a:ln/>
+        </p:spPr>
+        <p:txBody>
+          <a:bodyPr wrap="square" lIns="0" tIns="0" rIns="0" bIns="0" rtlCol="0" anchor="ctr">
+            <a:normAutofit/>
+          </a:bodyPr>
+          <a:lstStyle/>
+          <a:p>
+            <a:pPr indent="0" marL="0">
+              <a:buNone/>
+            </a:pPr>
+            <a:r>
+              <a:rPr lang="en-US" sz="1800" dirty="0">
+                <a:solidFill>
+                  <a:srgbClr val="1F2937"/>
+                </a:solidFill>
+              </a:rPr>
+              <a:t>D)  Sorteando valores</a:t>
+            </a:r>
+            <a:endParaRPr lang="en-US" sz="1800" dirty="0"/>
+          </a:p>
+        </p:txBody>
+      </p:sp>
+      <p:sp>
+        <p:nvSpPr>
+          <p:cNvPr id="25" name="Slide Number Placeholder 0"/>
+          <p:cNvSpPr>
+            <a:spLocks noGrp="1"/>
+          </p:cNvSpPr>
+          <p:nvPr>
+            <p:ph type="sldNum" sz="quarter" idx="4294967295"/>
+          </p:nvPr>
+        </p:nvSpPr>
+        <p:spPr>
+          <a:xfrm>
+            <a:off x="8412480" y="4828032"/>
+            <a:ext cx="457200" cy="228600"/>
+          </a:xfrm>
+          <a:prstGeom prst="rect">
+            <a:avLst/>
+          </a:prstGeom>
+          <a:extLst>
+            <a:ext uri="{C572A759-6A51-4108-AA02-DFA0A04FC94B}">
+              <ma14:wrappingTextBoxFlag xmlns:ma14="http://schemas.microsoft.com/office/mac/drawingml/2011/main" val="0"/>
+            </a:ext>
+          </a:extLst>
+        </p:spPr>
+        <p:txBody>
+          <a:bodyPr/>
+          <a:lstStyle>
+            <a:lvl1pPr>
+              <a:defRPr sz="900">
+                <a:solidFill>
+                  <a:srgbClr val="6B7280"/>
+                </a:solidFill>
+              </a:defRPr>
+            </a:lvl1pPr>
+          </a:lstStyle>
+          <a:p>
+            <a:pPr algn="l"/>
+            <a:fld id="{F7021451-1387-4CA6-816F-3879F97B5CBC}" type="slidenum">
+              <a:rPr b="0" lang="en-US"/>
+              <a:t>13</a:t>
+            </a:fld>
+            <a:endParaRPr lang="en-US"/>
+          </a:p>
+        </p:txBody>
+      </p:sp>
+    </p:spTree>
+  </p:cSld>
+  <p:clrMapOvr>
+    <a:masterClrMapping/>
+  </p:clrMapOvr>
+</p:sld>
+</file>
+
+<file path=ppt/slides/slide14.xml><?xml version="1.0" encoding="utf-8"?>
+<p:sld xmlns:a="http://schemas.openxmlformats.org/drawingml/2006/main" xmlns:r="http://schemas.openxmlformats.org/officeDocument/2006/relationships" xmlns:p="http://schemas.openxmlformats.org/presentationml/2006/main">
+  <p:cSld name="Slide 14">
+    <p:spTree>
+      <p:nvGrpSpPr>
+        <p:cNvPr id="1" name=""/>
+        <p:cNvGrpSpPr/>
+        <p:nvPr/>
+      </p:nvGrpSpPr>
+      <p:grpSpPr>
+        <a:xfrm>
+          <a:off x="0" y="0"/>
+          <a:ext cx="0" cy="0"/>
+          <a:chOff x="0" y="0"/>
+          <a:chExt cx="0" cy="0"/>
+        </a:xfrm>
+      </p:grpSpPr>
+      <p:sp>
+        <p:nvSpPr>
+          <p:cNvPr id="2" name="Text 0"/>
+          <p:cNvSpPr txBox="1"/>
+          <p:nvPr/>
+        </p:nvSpPr>
+        <p:spPr>
+          <a:xfrm>
+            <a:off x="365760" y="109728"/>
+            <a:ext cx="8412480" cy="658368"/>
+          </a:xfrm>
+          <a:prstGeom prst="rect">
+            <a:avLst/>
+          </a:prstGeom>
+          <a:noFill/>
+          <a:ln/>
+        </p:spPr>
+        <p:txBody>
+          <a:bodyPr wrap="square" lIns="0" tIns="0" rIns="0" bIns="0" rtlCol="0" anchor="ctr">
+            <a:normAutofit/>
+          </a:bodyPr>
+          <a:lstStyle/>
+          <a:p>
+            <a:pPr indent="0" marL="0">
+              <a:buNone/>
+            </a:pPr>
+            <a:r>
+              <a:rPr lang="en-US" sz="2600" b="1" dirty="0">
+                <a:solidFill>
+                  <a:srgbClr val="FFFFFF"/>
+                </a:solidFill>
+                <a:latin typeface="Calibri" pitchFamily="34" charset="0"/>
+                <a:ea typeface="Calibri" pitchFamily="34" charset="-122"/>
+                <a:cs typeface="Calibri" pitchFamily="34" charset="-120"/>
+              </a:rPr>
+              <a:t>Atividade</a:t>
+            </a:r>
+            <a:endParaRPr lang="en-US" sz="2600" dirty="0"/>
+          </a:p>
+        </p:txBody>
+      </p:sp>
+      <p:sp>
+        <p:nvSpPr>
+          <p:cNvPr id="3" name="Shape 1"/>
+          <p:cNvSpPr/>
+          <p:nvPr/>
+        </p:nvSpPr>
+        <p:spPr>
+          <a:xfrm>
+            <a:off x="548640" y="1188720"/>
+            <a:ext cx="8046720" cy="3108960"/>
+          </a:xfrm>
+          <a:prstGeom prst="roundRect">
+            <a:avLst>
+              <a:gd name="adj" fmla="val 3529"/>
+            </a:avLst>
+          </a:prstGeom>
+          <a:solidFill>
+            <a:srgbClr val="FFFBEB"/>
+          </a:solidFill>
+          <a:ln w="25400">
+            <a:solidFill>
+              <a:srgbClr val="F59E0B"/>
+            </a:solidFill>
+            <a:prstDash val="solid"/>
+          </a:ln>
+        </p:spPr>
+      </p:sp>
+      <p:sp>
+        <p:nvSpPr>
+          <p:cNvPr id="4" name="Text 2"/>
+          <p:cNvSpPr txBox="1"/>
+          <p:nvPr/>
+        </p:nvSpPr>
+        <p:spPr>
+          <a:xfrm>
+            <a:off x="822960" y="1325880"/>
+            <a:ext cx="3657600" cy="365760"/>
+          </a:xfrm>
+          <a:prstGeom prst="rect">
+            <a:avLst/>
+          </a:prstGeom>
+          <a:noFill/>
+          <a:ln/>
+        </p:spPr>
+        <p:txBody>
+          <a:bodyPr wrap="square" lIns="0" tIns="0" rIns="0" bIns="0" rtlCol="0" anchor="ctr"/>
+          <a:lstStyle/>
+          <a:p>
+            <a:pPr indent="0" marL="0">
+              <a:buNone/>
+            </a:pPr>
+            <a:r>
+              <a:rPr lang="en-US" sz="1400" b="1" spc="300" kern="0" dirty="0">
+                <a:solidFill>
+                  <a:srgbClr val="B45309"/>
+                </a:solidFill>
+              </a:rPr>
+              <a:t>MÃO NA MASSA</a:t>
+            </a:r>
+            <a:endParaRPr lang="en-US" sz="1400" dirty="0"/>
+          </a:p>
+        </p:txBody>
+      </p:sp>
+      <p:sp>
+        <p:nvSpPr>
+          <p:cNvPr id="5" name="Text 3"/>
+          <p:cNvSpPr txBox="1"/>
+          <p:nvPr/>
+        </p:nvSpPr>
+        <p:spPr>
+          <a:xfrm>
+            <a:off x="822960" y="1783080"/>
+            <a:ext cx="7498080" cy="2377440"/>
+          </a:xfrm>
+          <a:prstGeom prst="rect">
+            <a:avLst/>
+          </a:prstGeom>
+          <a:noFill/>
+          <a:ln/>
+        </p:spPr>
+        <p:txBody>
+          <a:bodyPr wrap="square" lIns="0" tIns="0" rIns="0" bIns="0" rtlCol="0" anchor="t">
+            <a:normAutofit/>
+          </a:bodyPr>
+          <a:lstStyle/>
+          <a:p>
+            <a:pPr indent="0" marL="0">
+              <a:buNone/>
+            </a:pPr>
+            <a:r>
+              <a:rPr lang="en-US" sz="2100" dirty="0">
+                <a:solidFill>
+                  <a:srgbClr val="1F2937"/>
+                </a:solidFill>
+              </a:rPr>
+              <a:t>Para E(w) = (w−2)², com w(0) = 0 e w(1) = 0,5, e gradientes S = 2(w−2): calcule o próximo passo do Quickprop. Ele é limitado por μ = 1,75?</a:t>
+            </a:r>
+            <a:endParaRPr lang="en-US" sz="2100" dirty="0"/>
+          </a:p>
+        </p:txBody>
+      </p:sp>
+      <p:sp>
+        <p:nvSpPr>
+          <p:cNvPr id="25" name="Slide Number Placeholder 0"/>
+          <p:cNvSpPr>
+            <a:spLocks noGrp="1"/>
+          </p:cNvSpPr>
+          <p:nvPr>
+            <p:ph type="sldNum" sz="quarter" idx="4294967295"/>
+          </p:nvPr>
+        </p:nvSpPr>
+        <p:spPr>
+          <a:xfrm>
+            <a:off x="8412480" y="4828032"/>
+            <a:ext cx="457200" cy="228600"/>
+          </a:xfrm>
+          <a:prstGeom prst="rect">
+            <a:avLst/>
+          </a:prstGeom>
+          <a:extLst>
+            <a:ext uri="{C572A759-6A51-4108-AA02-DFA0A04FC94B}">
+              <ma14:wrappingTextBoxFlag xmlns:ma14="http://schemas.microsoft.com/office/mac/drawingml/2011/main" val="0"/>
+            </a:ext>
+          </a:extLst>
+        </p:spPr>
+        <p:txBody>
+          <a:bodyPr/>
+          <a:lstStyle>
+            <a:lvl1pPr>
+              <a:defRPr sz="900">
+                <a:solidFill>
+                  <a:srgbClr val="6B7280"/>
+                </a:solidFill>
+              </a:defRPr>
+            </a:lvl1pPr>
+          </a:lstStyle>
+          <a:p>
+            <a:pPr algn="l"/>
+            <a:fld id="{F7021451-1387-4CA6-816F-3879F97B5CBC}" type="slidenum">
+              <a:rPr b="0" lang="en-US"/>
+              <a:t>14</a:t>
+            </a:fld>
+            <a:endParaRPr lang="en-US"/>
+          </a:p>
+        </p:txBody>
+      </p:sp>
+    </p:spTree>
+  </p:cSld>
+  <p:clrMapOvr>
+    <a:masterClrMapping/>
+  </p:clrMapOvr>
+</p:sld>
+</file>
+
+<file path=ppt/slides/slide15.xml><?xml version="1.0" encoding="utf-8"?>
+<p:sld xmlns:a="http://schemas.openxmlformats.org/drawingml/2006/main" xmlns:r="http://schemas.openxmlformats.org/officeDocument/2006/relationships" xmlns:p="http://schemas.openxmlformats.org/presentationml/2006/main">
+  <p:cSld name="Slide 15">
+    <p:spTree>
+      <p:nvGrpSpPr>
+        <p:cNvPr id="1" name=""/>
+        <p:cNvGrpSpPr/>
+        <p:nvPr/>
+      </p:nvGrpSpPr>
+      <p:grpSpPr>
+        <a:xfrm>
+          <a:off x="0" y="0"/>
+          <a:ext cx="0" cy="0"/>
+          <a:chOff x="0" y="0"/>
+          <a:chExt cx="0" cy="0"/>
+        </a:xfrm>
+      </p:grpSpPr>
+      <p:sp>
+        <p:nvSpPr>
+          <p:cNvPr id="2" name="Text 0"/>
+          <p:cNvSpPr txBox="1"/>
+          <p:nvPr/>
+        </p:nvSpPr>
+        <p:spPr>
+          <a:xfrm>
             <a:off x="640080" y="457200"/>
             <a:ext cx="7863840" cy="731520"/>
           </a:xfrm>
@@ -2204,6 +4200,130 @@
               <a:t>Ganho real, mas sensível a hiperparâmetros</a:t>
             </a:r>
             <a:endParaRPr lang="en-US" sz="2200" dirty="0"/>
+          </a:p>
+        </p:txBody>
+      </p:sp>
+    </p:spTree>
+  </p:cSld>
+  <p:clrMapOvr>
+    <a:masterClrMapping/>
+  </p:clrMapOvr>
+</p:sld>
+</file>
+
+<file path=ppt/slides/slide16.xml><?xml version="1.0" encoding="utf-8"?>
+<p:sld xmlns:a="http://schemas.openxmlformats.org/drawingml/2006/main" xmlns:r="http://schemas.openxmlformats.org/officeDocument/2006/relationships" xmlns:p="http://schemas.openxmlformats.org/presentationml/2006/main">
+  <p:cSld name="Slide 16">
+    <p:spTree>
+      <p:nvGrpSpPr>
+        <p:cNvPr id="1" name=""/>
+        <p:cNvGrpSpPr/>
+        <p:nvPr/>
+      </p:nvGrpSpPr>
+      <p:grpSpPr>
+        <a:xfrm>
+          <a:off x="0" y="0"/>
+          <a:ext cx="0" cy="0"/>
+          <a:chOff x="0" y="0"/>
+          <a:chExt cx="0" cy="0"/>
+        </a:xfrm>
+      </p:grpSpPr>
+      <p:sp>
+        <p:nvSpPr>
+          <p:cNvPr id="2" name="Shape 0"/>
+          <p:cNvSpPr/>
+          <p:nvPr/>
+        </p:nvSpPr>
+        <p:spPr>
+          <a:xfrm>
+            <a:off x="640080" y="1188720"/>
+            <a:ext cx="109728" cy="2194560"/>
+          </a:xfrm>
+          <a:prstGeom prst="rect">
+            <a:avLst/>
+          </a:prstGeom>
+          <a:solidFill>
+            <a:srgbClr val="F59E0B"/>
+          </a:solidFill>
+          <a:ln w="12700">
+            <a:solidFill>
+              <a:srgbClr val="F59E0B"/>
+            </a:solidFill>
+            <a:prstDash val="solid"/>
+          </a:ln>
+        </p:spPr>
+      </p:sp>
+      <p:sp>
+        <p:nvSpPr>
+          <p:cNvPr id="3" name="Text 1"/>
+          <p:cNvSpPr txBox="1"/>
+          <p:nvPr/>
+        </p:nvSpPr>
+        <p:spPr>
+          <a:xfrm>
+            <a:off x="1005840" y="1097280"/>
+            <a:ext cx="7498080" cy="2377440"/>
+          </a:xfrm>
+          <a:prstGeom prst="rect">
+            <a:avLst/>
+          </a:prstGeom>
+          <a:noFill/>
+          <a:ln/>
+        </p:spPr>
+        <p:txBody>
+          <a:bodyPr wrap="square" lIns="0" tIns="0" rIns="0" bIns="0" rtlCol="0" anchor="ctr">
+            <a:normAutofit/>
+          </a:bodyPr>
+          <a:lstStyle/>
+          <a:p>
+            <a:pPr indent="0" marL="0">
+              <a:buNone/>
+            </a:pPr>
+            <a:r>
+              <a:rPr lang="en-US" sz="3400" b="1" dirty="0">
+                <a:solidFill>
+                  <a:srgbClr val="FFFFFF"/>
+                </a:solidFill>
+              </a:rPr>
+              <a:t>“Quickprop: confie na curvatura, mas use cinto de segurança.”</a:t>
+            </a:r>
+            <a:endParaRPr lang="en-US" sz="3400" dirty="0"/>
+          </a:p>
+        </p:txBody>
+      </p:sp>
+      <p:sp>
+        <p:nvSpPr>
+          <p:cNvPr id="4" name="Text 2"/>
+          <p:cNvSpPr txBox="1"/>
+          <p:nvPr/>
+        </p:nvSpPr>
+        <p:spPr>
+          <a:xfrm>
+            <a:off x="1005840" y="3931920"/>
+            <a:ext cx="7315200" cy="365760"/>
+          </a:xfrm>
+          <a:prstGeom prst="rect">
+            <a:avLst/>
+          </a:prstGeom>
+          <a:noFill/>
+          <a:ln/>
+        </p:spPr>
+        <p:txBody>
+          <a:bodyPr wrap="square" lIns="0" tIns="0" rIns="0" bIns="0" rtlCol="0" anchor="ctr"/>
+          <a:lstStyle/>
+          <a:p>
+            <a:pPr indent="0" marL="0">
+              <a:buNone/>
+            </a:pPr>
+            <a:r>
+              <a:rPr lang="en-US" sz="1400" dirty="0">
+                <a:solidFill>
+                  <a:srgbClr val="A5B4FC"/>
+                </a:solidFill>
+              </a:rPr>
+              <a:t>Backpropagation e Redes Neurais · Capítulo 5</a:t>
+            </a:r>
+            <a:endParaRPr lang="en-US" sz="1400" dirty="0"/>
           </a:p>
         </p:txBody>
       </p:sp>
@@ -2267,7 +4387,7 @@
                 <a:ea typeface="Calibri" pitchFamily="34" charset="-122"/>
                 <a:cs typeface="Calibri" pitchFamily="34" charset="-120"/>
               </a:rPr>
-              <a:t>Situação inicial: o passo que olha a curvatura</a:t>
+              <a:t>Roteiro da aula</a:t>
             </a:r>
             <a:endParaRPr lang="en-US" sz="2600" dirty="0"/>
           </a:p>
@@ -2281,8 +4401,8 @@
         </p:nvSpPr>
         <p:spPr>
           <a:xfrm>
-            <a:off x="548640" y="1188720"/>
-            <a:ext cx="8046720" cy="3383280"/>
+            <a:off x="731520" y="1188720"/>
+            <a:ext cx="7680960" cy="3291840"/>
           </a:xfrm>
           <a:prstGeom prst="rect">
             <a:avLst/>
@@ -2291,63 +4411,121 @@
           <a:ln/>
         </p:spPr>
         <p:txBody>
-          <a:bodyPr wrap="square" lIns="0" tIns="0" rIns="0" bIns="0" rtlCol="0" anchor="t">
-            <a:normAutofit/>
-          </a:bodyPr>
+          <a:bodyPr wrap="square" lIns="0" tIns="0" rIns="0" bIns="0" rtlCol="0" anchor="t"/>
           <a:lstStyle/>
           <a:p>
             <a:pPr marL="342900" indent="-342900">
               <a:spcAft>
-                <a:spcPts val="1400"/>
+                <a:spcPts val="1200"/>
               </a:spcAft>
               <a:buSzPct val="100000"/>
-              <a:buChar char="•"/>
-            </a:pPr>
-            <a:r>
-              <a:rPr lang="en-US" sz="2400" dirty="0">
+              <a:buFont typeface="+mj-lt"/>
+              <a:buAutoNum type="arabicPeriod" startAt="1"/>
+            </a:pPr>
+            <a:r>
+              <a:rPr lang="en-US" sz="2200" dirty="0">
                 <a:solidFill>
                   <a:srgbClr val="1F2937"/>
                 </a:solidFill>
               </a:rPr>
-              <a:t>O gradiente descendente usa só a inclinação</a:t>
-            </a:r>
-            <a:endParaRPr lang="en-US" sz="2400" dirty="0"/>
+              <a:t>Situação inicial e objetivos</a:t>
+            </a:r>
+            <a:endParaRPr lang="en-US" sz="2200" dirty="0"/>
           </a:p>
           <a:p>
             <a:pPr marL="342900" indent="-342900">
               <a:spcAft>
-                <a:spcPts val="1400"/>
+                <a:spcPts val="1200"/>
               </a:spcAft>
               <a:buSzPct val="100000"/>
-              <a:buChar char="•"/>
-            </a:pPr>
-            <a:r>
-              <a:rPr lang="en-US" sz="2400" dirty="0">
+              <a:buFont typeface="+mj-lt"/>
+              <a:buAutoNum type="arabicPeriod" startAt="1"/>
+            </a:pPr>
+            <a:r>
+              <a:rPr lang="en-US" sz="2200" dirty="0">
                 <a:solidFill>
                   <a:srgbClr val="1F2937"/>
                 </a:solidFill>
               </a:rPr>
-              <a:t>Quickprop estima a curvatura por peso, sem calcular a Hessiana</a:t>
-            </a:r>
-            <a:endParaRPr lang="en-US" sz="2400" dirty="0"/>
+              <a:t>Analogia do dia a dia</a:t>
+            </a:r>
+            <a:endParaRPr lang="en-US" sz="2200" dirty="0"/>
           </a:p>
           <a:p>
             <a:pPr marL="342900" indent="-342900">
               <a:spcAft>
-                <a:spcPts val="1400"/>
+                <a:spcPts val="1200"/>
               </a:spcAft>
               <a:buSzPct val="100000"/>
-              <a:buChar char="•"/>
-            </a:pPr>
-            <a:r>
-              <a:rPr lang="en-US" sz="2400" dirty="0">
+              <a:buFont typeface="+mj-lt"/>
+              <a:buAutoNum type="arabicPeriod" startAt="1"/>
+            </a:pPr>
+            <a:r>
+              <a:rPr lang="en-US" sz="2200" dirty="0">
                 <a:solidFill>
                   <a:srgbClr val="1F2937"/>
                 </a:solidFill>
               </a:rPr>
-              <a:t>Ideia: ajustar uma parábola e saltar para o seu vértice</a:t>
-            </a:r>
-            <a:endParaRPr lang="en-US" sz="2400" dirty="0"/>
+              <a:t>Conceitos, demonstrações e figuras</a:t>
+            </a:r>
+            <a:endParaRPr lang="en-US" sz="2200" dirty="0"/>
+          </a:p>
+          <a:p>
+            <a:pPr marL="342900" indent="-342900">
+              <a:spcAft>
+                <a:spcPts val="1200"/>
+              </a:spcAft>
+              <a:buSzPct val="100000"/>
+              <a:buFont typeface="+mj-lt"/>
+              <a:buAutoNum type="arabicPeriod" startAt="1"/>
+            </a:pPr>
+            <a:r>
+              <a:rPr lang="en-US" sz="2200" dirty="0">
+                <a:solidFill>
+                  <a:srgbClr val="1F2937"/>
+                </a:solidFill>
+              </a:rPr>
+              <a:t>Exemplos e resultados do livro</a:t>
+            </a:r>
+            <a:endParaRPr lang="en-US" sz="2200" dirty="0"/>
+          </a:p>
+          <a:p>
+            <a:pPr marL="342900" indent="-342900">
+              <a:spcAft>
+                <a:spcPts val="1200"/>
+              </a:spcAft>
+              <a:buSzPct val="100000"/>
+              <a:buFont typeface="+mj-lt"/>
+              <a:buAutoNum type="arabicPeriod" startAt="1"/>
+            </a:pPr>
+            <a:r>
+              <a:rPr lang="en-US" sz="2200" dirty="0">
+                <a:solidFill>
+                  <a:srgbClr val="1F2937"/>
+                </a:solidFill>
+              </a:rPr>
+              <a:t>Quiz relâmpago</a:t>
+            </a:r>
+            <a:endParaRPr lang="en-US" sz="2200" dirty="0"/>
+          </a:p>
+          <a:p>
+            <a:pPr marL="342900" indent="-342900">
+              <a:spcAft>
+                <a:spcPts val="1200"/>
+              </a:spcAft>
+              <a:buSzPct val="100000"/>
+              <a:buFont typeface="+mj-lt"/>
+              <a:buAutoNum type="arabicPeriod" startAt="1"/>
+            </a:pPr>
+            <a:r>
+              <a:rPr lang="en-US" sz="2200" dirty="0">
+                <a:solidFill>
+                  <a:srgbClr val="1F2937"/>
+                </a:solidFill>
+              </a:rPr>
+              <a:t>Atividade mão na massa e síntese</a:t>
+            </a:r>
+            <a:endParaRPr lang="en-US" sz="2200" dirty="0"/>
           </a:p>
         </p:txBody>
       </p:sp>
@@ -2456,46 +4634,22 @@
                 <a:ea typeface="Calibri" pitchFamily="34" charset="-122"/>
                 <a:cs typeface="Calibri" pitchFamily="34" charset="-120"/>
               </a:rPr>
-              <a:t>A parábola secante</a:t>
+              <a:t>Situação inicial: o passo que olha a curvatura</a:t>
             </a:r>
             <a:endParaRPr lang="en-US" sz="2600" dirty="0"/>
           </a:p>
         </p:txBody>
       </p:sp>
-      <p:pic>
-        <p:nvPicPr>
-          <p:cNvPr id="3" name="Image 0" descr="Duas derivadas consecutivas definem uma reta; seu zero é o passo.">    </p:cNvPr>
-          <p:cNvPicPr>
-            <a:picLocks noChangeAspect="1"/>
-          </p:cNvPicPr>
-          <p:nvPr/>
-        </p:nvPicPr>
-        <p:blipFill>
-          <a:blip r:embed="rId1"/>
-          <a:stretch>
-            <a:fillRect/>
-          </a:stretch>
-        </p:blipFill>
-        <p:spPr>
-          <a:xfrm>
-            <a:off x="902014" y="1005840"/>
-            <a:ext cx="7339973" cy="3154680"/>
-          </a:xfrm>
-          <a:prstGeom prst="rect">
-            <a:avLst/>
-          </a:prstGeom>
-        </p:spPr>
-      </p:pic>
-      <p:sp>
-        <p:nvSpPr>
-          <p:cNvPr id="4" name="Text 1"/>
+      <p:sp>
+        <p:nvSpPr>
+          <p:cNvPr id="3" name="Text 1"/>
           <p:cNvSpPr txBox="1"/>
           <p:nvPr/>
         </p:nvSpPr>
         <p:spPr>
           <a:xfrm>
-            <a:off x="457200" y="4251960"/>
-            <a:ext cx="8229600" cy="457200"/>
+            <a:off x="548640" y="1188720"/>
+            <a:ext cx="8046720" cy="3383280"/>
           </a:xfrm>
           <a:prstGeom prst="rect">
             <a:avLst/>
@@ -2509,18 +4663,58 @@
           </a:bodyPr>
           <a:lstStyle/>
           <a:p>
-            <a:pPr algn="ctr" indent="0" marL="0">
-              <a:buNone/>
-            </a:pPr>
-            <a:r>
-              <a:rPr lang="en-US" sz="1400" i="1" dirty="0">
-                <a:solidFill>
-                  <a:srgbClr val="4B5563"/>
-                </a:solidFill>
-              </a:rPr>
-              <a:t>Duas derivadas consecutivas definem uma reta; seu zero é o passo.</a:t>
-            </a:r>
-            <a:endParaRPr lang="en-US" sz="1400" dirty="0"/>
+            <a:pPr marL="342900" indent="-342900">
+              <a:spcAft>
+                <a:spcPts val="1400"/>
+              </a:spcAft>
+              <a:buSzPct val="100000"/>
+              <a:buChar char="•"/>
+            </a:pPr>
+            <a:r>
+              <a:rPr lang="en-US" sz="2400" dirty="0">
+                <a:solidFill>
+                  <a:srgbClr val="1F2937"/>
+                </a:solidFill>
+              </a:rPr>
+              <a:t>O gradiente descendente usa só a inclinação</a:t>
+            </a:r>
+            <a:endParaRPr lang="en-US" sz="2400" dirty="0"/>
+          </a:p>
+          <a:p>
+            <a:pPr marL="342900" indent="-342900">
+              <a:spcAft>
+                <a:spcPts val="1400"/>
+              </a:spcAft>
+              <a:buSzPct val="100000"/>
+              <a:buChar char="•"/>
+            </a:pPr>
+            <a:r>
+              <a:rPr lang="en-US" sz="2400" dirty="0">
+                <a:solidFill>
+                  <a:srgbClr val="1F2937"/>
+                </a:solidFill>
+              </a:rPr>
+              <a:t>Quickprop estima a curvatura por peso, sem calcular a Hessiana</a:t>
+            </a:r>
+            <a:endParaRPr lang="en-US" sz="2400" dirty="0"/>
+          </a:p>
+          <a:p>
+            <a:pPr marL="342900" indent="-342900">
+              <a:spcAft>
+                <a:spcPts val="1400"/>
+              </a:spcAft>
+              <a:buSzPct val="100000"/>
+              <a:buChar char="•"/>
+            </a:pPr>
+            <a:r>
+              <a:rPr lang="en-US" sz="2400" dirty="0">
+                <a:solidFill>
+                  <a:srgbClr val="1F2937"/>
+                </a:solidFill>
+              </a:rPr>
+              <a:t>Ideia: ajustar uma parábola e saltar para o seu vértice</a:t>
+            </a:r>
+            <a:endParaRPr lang="en-US" sz="2400" dirty="0"/>
           </a:p>
         </p:txBody>
       </p:sp>
@@ -2629,49 +4823,46 @@
                 <a:ea typeface="Calibri" pitchFamily="34" charset="-122"/>
                 <a:cs typeface="Calibri" pitchFamily="34" charset="-120"/>
               </a:rPr>
-              <a:t>Dedução do passo, em etapas</a:t>
+              <a:t>A parábola secante</a:t>
             </a:r>
             <a:endParaRPr lang="en-US" sz="2600" dirty="0"/>
           </a:p>
         </p:txBody>
       </p:sp>
-      <p:sp>
-        <p:nvSpPr>
-          <p:cNvPr id="3" name="Shape 1"/>
-          <p:cNvSpPr/>
-          <p:nvPr/>
-        </p:nvSpPr>
-        <p:spPr>
-          <a:xfrm>
-            <a:off x="457200" y="1097280"/>
-            <a:ext cx="8229600" cy="868680"/>
-          </a:xfrm>
-          <a:prstGeom prst="roundRect">
-            <a:avLst>
-              <a:gd name="adj" fmla="val 8421"/>
-            </a:avLst>
-          </a:prstGeom>
-          <a:solidFill>
-            <a:srgbClr val="E0E7FF"/>
-          </a:solidFill>
-          <a:ln w="9525">
-            <a:solidFill>
-              <a:srgbClr val="C7D2FE"/>
-            </a:solidFill>
-            <a:prstDash val="solid"/>
-          </a:ln>
-        </p:spPr>
-      </p:sp>
-      <p:sp>
-        <p:nvSpPr>
-          <p:cNvPr id="4" name="Text 2"/>
+      <p:pic>
+        <p:nvPicPr>
+          <p:cNvPr id="3" name="Image 0" descr="Duas derivadas consecutivas definem uma reta; seu zero é o passo.">    </p:cNvPr>
+          <p:cNvPicPr>
+            <a:picLocks noChangeAspect="1"/>
+          </p:cNvPicPr>
+          <p:nvPr/>
+        </p:nvPicPr>
+        <p:blipFill>
+          <a:blip r:embed="rId1"/>
+          <a:stretch>
+            <a:fillRect/>
+          </a:stretch>
+        </p:blipFill>
+        <p:spPr>
+          <a:xfrm>
+            <a:off x="902014" y="1005840"/>
+            <a:ext cx="7339973" cy="3154680"/>
+          </a:xfrm>
+          <a:prstGeom prst="rect">
+            <a:avLst/>
+          </a:prstGeom>
+        </p:spPr>
+      </p:pic>
+      <p:sp>
+        <p:nvSpPr>
+          <p:cNvPr id="4" name="Text 1"/>
           <p:cNvSpPr txBox="1"/>
           <p:nvPr/>
         </p:nvSpPr>
         <p:spPr>
           <a:xfrm>
-            <a:off x="594360" y="1097280"/>
-            <a:ext cx="2743200" cy="868680"/>
+            <a:off x="457200" y="4251960"/>
+            <a:ext cx="8229600" cy="457200"/>
           </a:xfrm>
           <a:prstGeom prst="rect">
             <a:avLst/>
@@ -2680,382 +4871,23 @@
           <a:ln/>
         </p:spPr>
         <p:txBody>
-          <a:bodyPr wrap="square" lIns="0" tIns="0" rIns="0" bIns="0" rtlCol="0" anchor="ctr">
+          <a:bodyPr wrap="square" lIns="0" tIns="0" rIns="0" bIns="0" rtlCol="0" anchor="t">
             <a:normAutofit/>
           </a:bodyPr>
           <a:lstStyle/>
           <a:p>
-            <a:pPr indent="0" marL="0">
+            <a:pPr algn="ctr" indent="0" marL="0">
               <a:buNone/>
             </a:pPr>
             <a:r>
-              <a:rPr lang="en-US" sz="1400" b="1" dirty="0">
-                <a:solidFill>
-                  <a:srgbClr val="312E81"/>
-                </a:solidFill>
-              </a:rPr>
-              <a:t>1. Modelo</a:t>
+              <a:rPr lang="en-US" sz="1400" i="1" dirty="0">
+                <a:solidFill>
+                  <a:srgbClr val="4B5563"/>
+                </a:solidFill>
+              </a:rPr>
+              <a:t>Duas derivadas consecutivas definem uma reta; seu zero é o passo.</a:t>
             </a:r>
             <a:endParaRPr lang="en-US" sz="1400" dirty="0"/>
-          </a:p>
-        </p:txBody>
-      </p:sp>
-      <p:sp>
-        <p:nvSpPr>
-          <p:cNvPr id="5" name="Text 3"/>
-          <p:cNvSpPr txBox="1"/>
-          <p:nvPr/>
-        </p:nvSpPr>
-        <p:spPr>
-          <a:xfrm>
-            <a:off x="3383280" y="1097280"/>
-            <a:ext cx="5212080" cy="868680"/>
-          </a:xfrm>
-          <a:prstGeom prst="rect">
-            <a:avLst/>
-          </a:prstGeom>
-          <a:noFill/>
-          <a:ln/>
-        </p:spPr>
-        <p:txBody>
-          <a:bodyPr wrap="square" lIns="0" tIns="0" rIns="0" bIns="0" rtlCol="0" anchor="ctr">
-            <a:normAutofit/>
-          </a:bodyPr>
-          <a:lstStyle/>
-          <a:p>
-            <a:pPr indent="0" marL="0">
-              <a:buNone/>
-            </a:pPr>
-            <a:r>
-              <a:rPr lang="en-US" sz="1700" dirty="0">
-                <a:solidFill>
-                  <a:srgbClr val="1F2937"/>
-                </a:solidFill>
-                <a:latin typeface="Cambria Math" pitchFamily="34" charset="0"/>
-                <a:ea typeface="Cambria Math" pitchFamily="34" charset="-122"/>
-                <a:cs typeface="Cambria Math" pitchFamily="34" charset="-120"/>
-              </a:rPr>
-              <a:t>E′(w) ≈ reta pelas derivadas S(t−1) e S(t)</a:t>
-            </a:r>
-            <a:endParaRPr lang="en-US" sz="1700" dirty="0"/>
-          </a:p>
-        </p:txBody>
-      </p:sp>
-      <p:sp>
-        <p:nvSpPr>
-          <p:cNvPr id="6" name="Shape 4"/>
-          <p:cNvSpPr/>
-          <p:nvPr/>
-        </p:nvSpPr>
-        <p:spPr>
-          <a:xfrm>
-            <a:off x="457200" y="2039112"/>
-            <a:ext cx="8229600" cy="868680"/>
-          </a:xfrm>
-          <a:prstGeom prst="roundRect">
-            <a:avLst>
-              <a:gd name="adj" fmla="val 8421"/>
-            </a:avLst>
-          </a:prstGeom>
-          <a:solidFill>
-            <a:srgbClr val="EEF2FF"/>
-          </a:solidFill>
-          <a:ln w="9525">
-            <a:solidFill>
-              <a:srgbClr val="C7D2FE"/>
-            </a:solidFill>
-            <a:prstDash val="solid"/>
-          </a:ln>
-        </p:spPr>
-      </p:sp>
-      <p:sp>
-        <p:nvSpPr>
-          <p:cNvPr id="7" name="Text 5"/>
-          <p:cNvSpPr txBox="1"/>
-          <p:nvPr/>
-        </p:nvSpPr>
-        <p:spPr>
-          <a:xfrm>
-            <a:off x="594360" y="2039112"/>
-            <a:ext cx="2743200" cy="868680"/>
-          </a:xfrm>
-          <a:prstGeom prst="rect">
-            <a:avLst/>
-          </a:prstGeom>
-          <a:noFill/>
-          <a:ln/>
-        </p:spPr>
-        <p:txBody>
-          <a:bodyPr wrap="square" lIns="0" tIns="0" rIns="0" bIns="0" rtlCol="0" anchor="ctr">
-            <a:normAutofit/>
-          </a:bodyPr>
-          <a:lstStyle/>
-          <a:p>
-            <a:pPr indent="0" marL="0">
-              <a:buNone/>
-            </a:pPr>
-            <a:r>
-              <a:rPr lang="en-US" sz="1400" b="1" dirty="0">
-                <a:solidFill>
-                  <a:srgbClr val="312E81"/>
-                </a:solidFill>
-              </a:rPr>
-              <a:t>2. Inclinação</a:t>
-            </a:r>
-            <a:endParaRPr lang="en-US" sz="1400" dirty="0"/>
-          </a:p>
-        </p:txBody>
-      </p:sp>
-      <p:sp>
-        <p:nvSpPr>
-          <p:cNvPr id="8" name="Text 6"/>
-          <p:cNvSpPr txBox="1"/>
-          <p:nvPr/>
-        </p:nvSpPr>
-        <p:spPr>
-          <a:xfrm>
-            <a:off x="3383280" y="2039112"/>
-            <a:ext cx="5212080" cy="868680"/>
-          </a:xfrm>
-          <a:prstGeom prst="rect">
-            <a:avLst/>
-          </a:prstGeom>
-          <a:noFill/>
-          <a:ln/>
-        </p:spPr>
-        <p:txBody>
-          <a:bodyPr wrap="square" lIns="0" tIns="0" rIns="0" bIns="0" rtlCol="0" anchor="ctr">
-            <a:normAutofit/>
-          </a:bodyPr>
-          <a:lstStyle/>
-          <a:p>
-            <a:pPr indent="0" marL="0">
-              <a:buNone/>
-            </a:pPr>
-            <a:r>
-              <a:rPr lang="en-US" sz="1700" dirty="0">
-                <a:solidFill>
-                  <a:srgbClr val="1F2937"/>
-                </a:solidFill>
-                <a:latin typeface="Cambria Math" pitchFamily="34" charset="0"/>
-                <a:ea typeface="Cambria Math" pitchFamily="34" charset="-122"/>
-                <a:cs typeface="Cambria Math" pitchFamily="34" charset="-120"/>
-              </a:rPr>
-              <a:t>(S(t) − S(t−1)) / Δw(t−1)</a:t>
-            </a:r>
-            <a:endParaRPr lang="en-US" sz="1700" dirty="0"/>
-          </a:p>
-        </p:txBody>
-      </p:sp>
-      <p:sp>
-        <p:nvSpPr>
-          <p:cNvPr id="9" name="Shape 7"/>
-          <p:cNvSpPr/>
-          <p:nvPr/>
-        </p:nvSpPr>
-        <p:spPr>
-          <a:xfrm>
-            <a:off x="457200" y="2980944"/>
-            <a:ext cx="8229600" cy="868680"/>
-          </a:xfrm>
-          <a:prstGeom prst="roundRect">
-            <a:avLst>
-              <a:gd name="adj" fmla="val 8421"/>
-            </a:avLst>
-          </a:prstGeom>
-          <a:solidFill>
-            <a:srgbClr val="E0E7FF"/>
-          </a:solidFill>
-          <a:ln w="9525">
-            <a:solidFill>
-              <a:srgbClr val="C7D2FE"/>
-            </a:solidFill>
-            <a:prstDash val="solid"/>
-          </a:ln>
-        </p:spPr>
-      </p:sp>
-      <p:sp>
-        <p:nvSpPr>
-          <p:cNvPr id="10" name="Text 8"/>
-          <p:cNvSpPr txBox="1"/>
-          <p:nvPr/>
-        </p:nvSpPr>
-        <p:spPr>
-          <a:xfrm>
-            <a:off x="594360" y="2980944"/>
-            <a:ext cx="2743200" cy="868680"/>
-          </a:xfrm>
-          <a:prstGeom prst="rect">
-            <a:avLst/>
-          </a:prstGeom>
-          <a:noFill/>
-          <a:ln/>
-        </p:spPr>
-        <p:txBody>
-          <a:bodyPr wrap="square" lIns="0" tIns="0" rIns="0" bIns="0" rtlCol="0" anchor="ctr">
-            <a:normAutofit/>
-          </a:bodyPr>
-          <a:lstStyle/>
-          <a:p>
-            <a:pPr indent="0" marL="0">
-              <a:buNone/>
-            </a:pPr>
-            <a:r>
-              <a:rPr lang="en-US" sz="1400" b="1" dirty="0">
-                <a:solidFill>
-                  <a:srgbClr val="312E81"/>
-                </a:solidFill>
-              </a:rPr>
-              <a:t>3. Zero da reta</a:t>
-            </a:r>
-            <a:endParaRPr lang="en-US" sz="1400" dirty="0"/>
-          </a:p>
-        </p:txBody>
-      </p:sp>
-      <p:sp>
-        <p:nvSpPr>
-          <p:cNvPr id="11" name="Text 9"/>
-          <p:cNvSpPr txBox="1"/>
-          <p:nvPr/>
-        </p:nvSpPr>
-        <p:spPr>
-          <a:xfrm>
-            <a:off x="3383280" y="2980944"/>
-            <a:ext cx="5212080" cy="868680"/>
-          </a:xfrm>
-          <a:prstGeom prst="rect">
-            <a:avLst/>
-          </a:prstGeom>
-          <a:noFill/>
-          <a:ln/>
-        </p:spPr>
-        <p:txBody>
-          <a:bodyPr wrap="square" lIns="0" tIns="0" rIns="0" bIns="0" rtlCol="0" anchor="ctr">
-            <a:normAutofit/>
-          </a:bodyPr>
-          <a:lstStyle/>
-          <a:p>
-            <a:pPr indent="0" marL="0">
-              <a:buNone/>
-            </a:pPr>
-            <a:r>
-              <a:rPr lang="en-US" sz="1700" dirty="0">
-                <a:solidFill>
-                  <a:srgbClr val="1F2937"/>
-                </a:solidFill>
-                <a:latin typeface="Cambria Math" pitchFamily="34" charset="0"/>
-                <a:ea typeface="Cambria Math" pitchFamily="34" charset="-122"/>
-                <a:cs typeface="Cambria Math" pitchFamily="34" charset="-120"/>
-              </a:rPr>
-              <a:t>Δw(t) = S(t) / (S(t−1) − S(t)) · Δw(t−1)</a:t>
-            </a:r>
-            <a:endParaRPr lang="en-US" sz="1700" dirty="0"/>
-          </a:p>
-        </p:txBody>
-      </p:sp>
-      <p:sp>
-        <p:nvSpPr>
-          <p:cNvPr id="12" name="Shape 10"/>
-          <p:cNvSpPr/>
-          <p:nvPr/>
-        </p:nvSpPr>
-        <p:spPr>
-          <a:xfrm>
-            <a:off x="457200" y="3922776"/>
-            <a:ext cx="8229600" cy="868680"/>
-          </a:xfrm>
-          <a:prstGeom prst="roundRect">
-            <a:avLst>
-              <a:gd name="adj" fmla="val 8421"/>
-            </a:avLst>
-          </a:prstGeom>
-          <a:solidFill>
-            <a:srgbClr val="EEF2FF"/>
-          </a:solidFill>
-          <a:ln w="9525">
-            <a:solidFill>
-              <a:srgbClr val="C7D2FE"/>
-            </a:solidFill>
-            <a:prstDash val="solid"/>
-          </a:ln>
-        </p:spPr>
-      </p:sp>
-      <p:sp>
-        <p:nvSpPr>
-          <p:cNvPr id="13" name="Text 11"/>
-          <p:cNvSpPr txBox="1"/>
-          <p:nvPr/>
-        </p:nvSpPr>
-        <p:spPr>
-          <a:xfrm>
-            <a:off x="594360" y="3922776"/>
-            <a:ext cx="2743200" cy="868680"/>
-          </a:xfrm>
-          <a:prstGeom prst="rect">
-            <a:avLst/>
-          </a:prstGeom>
-          <a:noFill/>
-          <a:ln/>
-        </p:spPr>
-        <p:txBody>
-          <a:bodyPr wrap="square" lIns="0" tIns="0" rIns="0" bIns="0" rtlCol="0" anchor="ctr">
-            <a:normAutofit/>
-          </a:bodyPr>
-          <a:lstStyle/>
-          <a:p>
-            <a:pPr indent="0" marL="0">
-              <a:buNone/>
-            </a:pPr>
-            <a:r>
-              <a:rPr lang="en-US" sz="1400" b="1" dirty="0">
-                <a:solidFill>
-                  <a:srgbClr val="312E81"/>
-                </a:solidFill>
-              </a:rPr>
-              <a:t>4. Limite</a:t>
-            </a:r>
-            <a:endParaRPr lang="en-US" sz="1400" dirty="0"/>
-          </a:p>
-        </p:txBody>
-      </p:sp>
-      <p:sp>
-        <p:nvSpPr>
-          <p:cNvPr id="14" name="Text 12"/>
-          <p:cNvSpPr txBox="1"/>
-          <p:nvPr/>
-        </p:nvSpPr>
-        <p:spPr>
-          <a:xfrm>
-            <a:off x="3383280" y="3922776"/>
-            <a:ext cx="5212080" cy="868680"/>
-          </a:xfrm>
-          <a:prstGeom prst="rect">
-            <a:avLst/>
-          </a:prstGeom>
-          <a:noFill/>
-          <a:ln/>
-        </p:spPr>
-        <p:txBody>
-          <a:bodyPr wrap="square" lIns="0" tIns="0" rIns="0" bIns="0" rtlCol="0" anchor="ctr">
-            <a:normAutofit/>
-          </a:bodyPr>
-          <a:lstStyle/>
-          <a:p>
-            <a:pPr indent="0" marL="0">
-              <a:buNone/>
-            </a:pPr>
-            <a:r>
-              <a:rPr lang="en-US" sz="1700" dirty="0">
-                <a:solidFill>
-                  <a:srgbClr val="1F2937"/>
-                </a:solidFill>
-                <a:latin typeface="Cambria Math" pitchFamily="34" charset="0"/>
-                <a:ea typeface="Cambria Math" pitchFamily="34" charset="-122"/>
-                <a:cs typeface="Cambria Math" pitchFamily="34" charset="-120"/>
-              </a:rPr>
-              <a:t>|Δw(t)| ≤ μ |Δw(t−1)|,  μ = 1,75</a:t>
-            </a:r>
-            <a:endParaRPr lang="en-US" sz="1700" dirty="0"/>
           </a:p>
         </p:txBody>
       </p:sp>
@@ -3164,7 +4996,7 @@
                 <a:ea typeface="Calibri" pitchFamily="34" charset="-122"/>
                 <a:cs typeface="Calibri" pitchFamily="34" charset="-120"/>
               </a:rPr>
-              <a:t>Regras de segurança</a:t>
+              <a:t>Analogia: estimar onde o vale termina</a:t>
             </a:r>
             <a:endParaRPr lang="en-US" sz="2600" dirty="0"/>
           </a:p>
@@ -3172,14 +5004,77 @@
       </p:sp>
       <p:sp>
         <p:nvSpPr>
-          <p:cNvPr id="3" name="Text 1"/>
+          <p:cNvPr id="3" name="Shape 1"/>
+          <p:cNvSpPr/>
+          <p:nvPr/>
+        </p:nvSpPr>
+        <p:spPr>
+          <a:xfrm>
+            <a:off x="548640" y="1188720"/>
+            <a:ext cx="8046720" cy="3108960"/>
+          </a:xfrm>
+          <a:prstGeom prst="roundRect">
+            <a:avLst>
+              <a:gd name="adj" fmla="val 3529"/>
+            </a:avLst>
+          </a:prstGeom>
+          <a:solidFill>
+            <a:srgbClr val="ECFEFF"/>
+          </a:solidFill>
+          <a:ln w="25400">
+            <a:solidFill>
+              <a:srgbClr val="06B6D4"/>
+            </a:solidFill>
+            <a:prstDash val="solid"/>
+          </a:ln>
+        </p:spPr>
+      </p:sp>
+      <p:sp>
+        <p:nvSpPr>
+          <p:cNvPr id="4" name="Text 2"/>
           <p:cNvSpPr txBox="1"/>
           <p:nvPr/>
         </p:nvSpPr>
         <p:spPr>
           <a:xfrm>
-            <a:off x="548640" y="1188720"/>
-            <a:ext cx="8046720" cy="3383280"/>
+            <a:off x="822960" y="1325880"/>
+            <a:ext cx="3657600" cy="365760"/>
+          </a:xfrm>
+          <a:prstGeom prst="rect">
+            <a:avLst/>
+          </a:prstGeom>
+          <a:noFill/>
+          <a:ln/>
+        </p:spPr>
+        <p:txBody>
+          <a:bodyPr wrap="square" lIns="0" tIns="0" rIns="0" bIns="0" rtlCol="0" anchor="ctr"/>
+          <a:lstStyle/>
+          <a:p>
+            <a:pPr indent="0" marL="0">
+              <a:buNone/>
+            </a:pPr>
+            <a:r>
+              <a:rPr lang="en-US" sz="1400" b="1" spc="300" kern="0" dirty="0">
+                <a:solidFill>
+                  <a:srgbClr val="0E7490"/>
+                </a:solidFill>
+              </a:rPr>
+              <a:t>NO SEU DIA A DIA</a:t>
+            </a:r>
+            <a:endParaRPr lang="en-US" sz="1400" dirty="0"/>
+          </a:p>
+        </p:txBody>
+      </p:sp>
+      <p:sp>
+        <p:nvSpPr>
+          <p:cNvPr id="5" name="Text 3"/>
+          <p:cNvSpPr txBox="1"/>
+          <p:nvPr/>
+        </p:nvSpPr>
+        <p:spPr>
+          <a:xfrm>
+            <a:off x="822960" y="1783080"/>
+            <a:ext cx="7498080" cy="2377440"/>
           </a:xfrm>
           <a:prstGeom prst="rect">
             <a:avLst/>
@@ -3193,76 +5088,18 @@
           </a:bodyPr>
           <a:lstStyle/>
           <a:p>
-            <a:pPr marL="342900" indent="-342900">
-              <a:spcAft>
-                <a:spcPts val="1400"/>
-              </a:spcAft>
-              <a:buSzPct val="100000"/>
-              <a:buChar char="•"/>
-            </a:pPr>
-            <a:r>
-              <a:rPr lang="en-US" sz="2400" dirty="0">
+            <a:pPr indent="0" marL="0">
+              <a:buNone/>
+            </a:pPr>
+            <a:r>
+              <a:rPr lang="en-US" sz="2100" dirty="0">
                 <a:solidFill>
                   <a:srgbClr val="1F2937"/>
                 </a:solidFill>
               </a:rPr>
-              <a:t>Se o passo anterior é nulo: usar o gradiente descendente (termo ε)</a:t>
-            </a:r>
-            <a:endParaRPr lang="en-US" sz="2400" dirty="0"/>
-          </a:p>
-          <a:p>
-            <a:pPr marL="342900" indent="-342900">
-              <a:spcAft>
-                <a:spcPts val="1400"/>
-              </a:spcAft>
-              <a:buSzPct val="100000"/>
-              <a:buChar char="•"/>
-            </a:pPr>
-            <a:r>
-              <a:rPr lang="en-US" sz="2400" dirty="0">
-                <a:solidFill>
-                  <a:srgbClr val="1F2937"/>
-                </a:solidFill>
-              </a:rPr>
-              <a:t>Se mesmo sinal e |S| diminuiu pouco: limitar por μ</a:t>
-            </a:r>
-            <a:endParaRPr lang="en-US" sz="2400" dirty="0"/>
-          </a:p>
-          <a:p>
-            <a:pPr marL="342900" indent="-342900">
-              <a:spcAft>
-                <a:spcPts val="1400"/>
-              </a:spcAft>
-              <a:buSzPct val="100000"/>
-              <a:buChar char="•"/>
-            </a:pPr>
-            <a:r>
-              <a:rPr lang="en-US" sz="2400" dirty="0">
-                <a:solidFill>
-                  <a:srgbClr val="1F2937"/>
-                </a:solidFill>
-              </a:rPr>
-              <a:t>Decaimento de pesos para controlar o crescimento</a:t>
-            </a:r>
-            <a:endParaRPr lang="en-US" sz="2400" dirty="0"/>
-          </a:p>
-          <a:p>
-            <a:pPr marL="342900" indent="-342900">
-              <a:spcAft>
-                <a:spcPts val="1400"/>
-              </a:spcAft>
-              <a:buSzPct val="100000"/>
-              <a:buChar char="•"/>
-            </a:pPr>
-            <a:r>
-              <a:rPr lang="en-US" sz="2400" dirty="0">
-                <a:solidFill>
-                  <a:srgbClr val="1F2937"/>
-                </a:solidFill>
-              </a:rPr>
-              <a:t>Artifício de Fahlman: somar 0,1 à derivada da sigmoide</a:t>
-            </a:r>
-            <a:endParaRPr lang="en-US" sz="2400" dirty="0"/>
+              <a:t>O gradiente descendente anda degrau por degrau. O Quickprop olha dois pontos da descida, estima a curva do vale e salta direto para onde ele deve terminar. Como todo atalho, pode errar feio: por isso há um limite para o tamanho do salto.</a:t>
+            </a:r>
+            <a:endParaRPr lang="en-US" sz="2100" dirty="0"/>
           </a:p>
         </p:txBody>
       </p:sp>
@@ -3371,46 +5208,49 @@
                 <a:ea typeface="Calibri" pitchFamily="34" charset="-122"/>
                 <a:cs typeface="Calibri" pitchFamily="34" charset="-120"/>
               </a:rPr>
-              <a:t>Quickprop contra gradiente descendente</a:t>
+              <a:t>Dedução do passo, em etapas</a:t>
             </a:r>
             <a:endParaRPr lang="en-US" sz="2600" dirty="0"/>
           </a:p>
         </p:txBody>
       </p:sp>
-      <p:pic>
-        <p:nvPicPr>
-          <p:cNvPr id="3" name="Image 0" descr="Mesma rede e inicialização; hiperparâmetros ajustados para cada um.">    </p:cNvPr>
-          <p:cNvPicPr>
-            <a:picLocks noChangeAspect="1"/>
-          </p:cNvPicPr>
-          <p:nvPr/>
-        </p:nvPicPr>
-        <p:blipFill>
-          <a:blip r:embed="rId1"/>
-          <a:stretch>
-            <a:fillRect/>
-          </a:stretch>
-        </p:blipFill>
-        <p:spPr>
-          <a:xfrm>
-            <a:off x="870593" y="1005840"/>
-            <a:ext cx="7402815" cy="3154680"/>
-          </a:xfrm>
-          <a:prstGeom prst="rect">
-            <a:avLst/>
-          </a:prstGeom>
-        </p:spPr>
-      </p:pic>
-      <p:sp>
-        <p:nvSpPr>
-          <p:cNvPr id="4" name="Text 1"/>
+      <p:sp>
+        <p:nvSpPr>
+          <p:cNvPr id="3" name="Shape 1"/>
+          <p:cNvSpPr/>
+          <p:nvPr/>
+        </p:nvSpPr>
+        <p:spPr>
+          <a:xfrm>
+            <a:off x="457200" y="1097280"/>
+            <a:ext cx="8229600" cy="868680"/>
+          </a:xfrm>
+          <a:prstGeom prst="roundRect">
+            <a:avLst>
+              <a:gd name="adj" fmla="val 8421"/>
+            </a:avLst>
+          </a:prstGeom>
+          <a:solidFill>
+            <a:srgbClr val="E0E7FF"/>
+          </a:solidFill>
+          <a:ln w="9525">
+            <a:solidFill>
+              <a:srgbClr val="C7D2FE"/>
+            </a:solidFill>
+            <a:prstDash val="solid"/>
+          </a:ln>
+        </p:spPr>
+      </p:sp>
+      <p:sp>
+        <p:nvSpPr>
+          <p:cNvPr id="4" name="Text 2"/>
           <p:cNvSpPr txBox="1"/>
           <p:nvPr/>
         </p:nvSpPr>
         <p:spPr>
           <a:xfrm>
-            <a:off x="457200" y="4251960"/>
-            <a:ext cx="8229600" cy="457200"/>
+            <a:off x="594360" y="1097280"/>
+            <a:ext cx="2743200" cy="868680"/>
           </a:xfrm>
           <a:prstGeom prst="rect">
             <a:avLst/>
@@ -3419,23 +5259,382 @@
           <a:ln/>
         </p:spPr>
         <p:txBody>
-          <a:bodyPr wrap="square" lIns="0" tIns="0" rIns="0" bIns="0" rtlCol="0" anchor="t">
+          <a:bodyPr wrap="square" lIns="0" tIns="0" rIns="0" bIns="0" rtlCol="0" anchor="ctr">
             <a:normAutofit/>
           </a:bodyPr>
           <a:lstStyle/>
           <a:p>
-            <a:pPr algn="ctr" indent="0" marL="0">
+            <a:pPr indent="0" marL="0">
               <a:buNone/>
             </a:pPr>
             <a:r>
-              <a:rPr lang="en-US" sz="1400" i="1" dirty="0">
-                <a:solidFill>
-                  <a:srgbClr val="4B5563"/>
-                </a:solidFill>
-              </a:rPr>
-              <a:t>Mesma rede e inicialização; hiperparâmetros ajustados para cada um.</a:t>
+              <a:rPr lang="en-US" sz="1400" b="1" dirty="0">
+                <a:solidFill>
+                  <a:srgbClr val="312E81"/>
+                </a:solidFill>
+              </a:rPr>
+              <a:t>1. Modelo</a:t>
             </a:r>
             <a:endParaRPr lang="en-US" sz="1400" dirty="0"/>
+          </a:p>
+        </p:txBody>
+      </p:sp>
+      <p:sp>
+        <p:nvSpPr>
+          <p:cNvPr id="5" name="Text 3"/>
+          <p:cNvSpPr txBox="1"/>
+          <p:nvPr/>
+        </p:nvSpPr>
+        <p:spPr>
+          <a:xfrm>
+            <a:off x="3383280" y="1097280"/>
+            <a:ext cx="5212080" cy="868680"/>
+          </a:xfrm>
+          <a:prstGeom prst="rect">
+            <a:avLst/>
+          </a:prstGeom>
+          <a:noFill/>
+          <a:ln/>
+        </p:spPr>
+        <p:txBody>
+          <a:bodyPr wrap="square" lIns="0" tIns="0" rIns="0" bIns="0" rtlCol="0" anchor="ctr">
+            <a:normAutofit/>
+          </a:bodyPr>
+          <a:lstStyle/>
+          <a:p>
+            <a:pPr indent="0" marL="0">
+              <a:buNone/>
+            </a:pPr>
+            <a:r>
+              <a:rPr lang="en-US" sz="1700" dirty="0">
+                <a:solidFill>
+                  <a:srgbClr val="1F2937"/>
+                </a:solidFill>
+                <a:latin typeface="Cambria Math" pitchFamily="34" charset="0"/>
+                <a:ea typeface="Cambria Math" pitchFamily="34" charset="-122"/>
+                <a:cs typeface="Cambria Math" pitchFamily="34" charset="-120"/>
+              </a:rPr>
+              <a:t>E′(w) ≈ reta pelas derivadas S(t−1) e S(t)</a:t>
+            </a:r>
+            <a:endParaRPr lang="en-US" sz="1700" dirty="0"/>
+          </a:p>
+        </p:txBody>
+      </p:sp>
+      <p:sp>
+        <p:nvSpPr>
+          <p:cNvPr id="6" name="Shape 4"/>
+          <p:cNvSpPr/>
+          <p:nvPr/>
+        </p:nvSpPr>
+        <p:spPr>
+          <a:xfrm>
+            <a:off x="457200" y="2039112"/>
+            <a:ext cx="8229600" cy="868680"/>
+          </a:xfrm>
+          <a:prstGeom prst="roundRect">
+            <a:avLst>
+              <a:gd name="adj" fmla="val 8421"/>
+            </a:avLst>
+          </a:prstGeom>
+          <a:solidFill>
+            <a:srgbClr val="EEF2FF"/>
+          </a:solidFill>
+          <a:ln w="9525">
+            <a:solidFill>
+              <a:srgbClr val="C7D2FE"/>
+            </a:solidFill>
+            <a:prstDash val="solid"/>
+          </a:ln>
+        </p:spPr>
+      </p:sp>
+      <p:sp>
+        <p:nvSpPr>
+          <p:cNvPr id="7" name="Text 5"/>
+          <p:cNvSpPr txBox="1"/>
+          <p:nvPr/>
+        </p:nvSpPr>
+        <p:spPr>
+          <a:xfrm>
+            <a:off x="594360" y="2039112"/>
+            <a:ext cx="2743200" cy="868680"/>
+          </a:xfrm>
+          <a:prstGeom prst="rect">
+            <a:avLst/>
+          </a:prstGeom>
+          <a:noFill/>
+          <a:ln/>
+        </p:spPr>
+        <p:txBody>
+          <a:bodyPr wrap="square" lIns="0" tIns="0" rIns="0" bIns="0" rtlCol="0" anchor="ctr">
+            <a:normAutofit/>
+          </a:bodyPr>
+          <a:lstStyle/>
+          <a:p>
+            <a:pPr indent="0" marL="0">
+              <a:buNone/>
+            </a:pPr>
+            <a:r>
+              <a:rPr lang="en-US" sz="1400" b="1" dirty="0">
+                <a:solidFill>
+                  <a:srgbClr val="312E81"/>
+                </a:solidFill>
+              </a:rPr>
+              <a:t>2. Inclinação</a:t>
+            </a:r>
+            <a:endParaRPr lang="en-US" sz="1400" dirty="0"/>
+          </a:p>
+        </p:txBody>
+      </p:sp>
+      <p:sp>
+        <p:nvSpPr>
+          <p:cNvPr id="8" name="Text 6"/>
+          <p:cNvSpPr txBox="1"/>
+          <p:nvPr/>
+        </p:nvSpPr>
+        <p:spPr>
+          <a:xfrm>
+            <a:off x="3383280" y="2039112"/>
+            <a:ext cx="5212080" cy="868680"/>
+          </a:xfrm>
+          <a:prstGeom prst="rect">
+            <a:avLst/>
+          </a:prstGeom>
+          <a:noFill/>
+          <a:ln/>
+        </p:spPr>
+        <p:txBody>
+          <a:bodyPr wrap="square" lIns="0" tIns="0" rIns="0" bIns="0" rtlCol="0" anchor="ctr">
+            <a:normAutofit/>
+          </a:bodyPr>
+          <a:lstStyle/>
+          <a:p>
+            <a:pPr indent="0" marL="0">
+              <a:buNone/>
+            </a:pPr>
+            <a:r>
+              <a:rPr lang="en-US" sz="1700" dirty="0">
+                <a:solidFill>
+                  <a:srgbClr val="1F2937"/>
+                </a:solidFill>
+                <a:latin typeface="Cambria Math" pitchFamily="34" charset="0"/>
+                <a:ea typeface="Cambria Math" pitchFamily="34" charset="-122"/>
+                <a:cs typeface="Cambria Math" pitchFamily="34" charset="-120"/>
+              </a:rPr>
+              <a:t>(S(t) − S(t−1)) / Δw(t−1)</a:t>
+            </a:r>
+            <a:endParaRPr lang="en-US" sz="1700" dirty="0"/>
+          </a:p>
+        </p:txBody>
+      </p:sp>
+      <p:sp>
+        <p:nvSpPr>
+          <p:cNvPr id="9" name="Shape 7"/>
+          <p:cNvSpPr/>
+          <p:nvPr/>
+        </p:nvSpPr>
+        <p:spPr>
+          <a:xfrm>
+            <a:off x="457200" y="2980944"/>
+            <a:ext cx="8229600" cy="868680"/>
+          </a:xfrm>
+          <a:prstGeom prst="roundRect">
+            <a:avLst>
+              <a:gd name="adj" fmla="val 8421"/>
+            </a:avLst>
+          </a:prstGeom>
+          <a:solidFill>
+            <a:srgbClr val="E0E7FF"/>
+          </a:solidFill>
+          <a:ln w="9525">
+            <a:solidFill>
+              <a:srgbClr val="C7D2FE"/>
+            </a:solidFill>
+            <a:prstDash val="solid"/>
+          </a:ln>
+        </p:spPr>
+      </p:sp>
+      <p:sp>
+        <p:nvSpPr>
+          <p:cNvPr id="10" name="Text 8"/>
+          <p:cNvSpPr txBox="1"/>
+          <p:nvPr/>
+        </p:nvSpPr>
+        <p:spPr>
+          <a:xfrm>
+            <a:off x="594360" y="2980944"/>
+            <a:ext cx="2743200" cy="868680"/>
+          </a:xfrm>
+          <a:prstGeom prst="rect">
+            <a:avLst/>
+          </a:prstGeom>
+          <a:noFill/>
+          <a:ln/>
+        </p:spPr>
+        <p:txBody>
+          <a:bodyPr wrap="square" lIns="0" tIns="0" rIns="0" bIns="0" rtlCol="0" anchor="ctr">
+            <a:normAutofit/>
+          </a:bodyPr>
+          <a:lstStyle/>
+          <a:p>
+            <a:pPr indent="0" marL="0">
+              <a:buNone/>
+            </a:pPr>
+            <a:r>
+              <a:rPr lang="en-US" sz="1400" b="1" dirty="0">
+                <a:solidFill>
+                  <a:srgbClr val="312E81"/>
+                </a:solidFill>
+              </a:rPr>
+              <a:t>3. Zero da reta</a:t>
+            </a:r>
+            <a:endParaRPr lang="en-US" sz="1400" dirty="0"/>
+          </a:p>
+        </p:txBody>
+      </p:sp>
+      <p:sp>
+        <p:nvSpPr>
+          <p:cNvPr id="11" name="Text 9"/>
+          <p:cNvSpPr txBox="1"/>
+          <p:nvPr/>
+        </p:nvSpPr>
+        <p:spPr>
+          <a:xfrm>
+            <a:off x="3383280" y="2980944"/>
+            <a:ext cx="5212080" cy="868680"/>
+          </a:xfrm>
+          <a:prstGeom prst="rect">
+            <a:avLst/>
+          </a:prstGeom>
+          <a:noFill/>
+          <a:ln/>
+        </p:spPr>
+        <p:txBody>
+          <a:bodyPr wrap="square" lIns="0" tIns="0" rIns="0" bIns="0" rtlCol="0" anchor="ctr">
+            <a:normAutofit/>
+          </a:bodyPr>
+          <a:lstStyle/>
+          <a:p>
+            <a:pPr indent="0" marL="0">
+              <a:buNone/>
+            </a:pPr>
+            <a:r>
+              <a:rPr lang="en-US" sz="1700" dirty="0">
+                <a:solidFill>
+                  <a:srgbClr val="1F2937"/>
+                </a:solidFill>
+                <a:latin typeface="Cambria Math" pitchFamily="34" charset="0"/>
+                <a:ea typeface="Cambria Math" pitchFamily="34" charset="-122"/>
+                <a:cs typeface="Cambria Math" pitchFamily="34" charset="-120"/>
+              </a:rPr>
+              <a:t>Δw(t) = S(t) / (S(t−1) − S(t)) · Δw(t−1)</a:t>
+            </a:r>
+            <a:endParaRPr lang="en-US" sz="1700" dirty="0"/>
+          </a:p>
+        </p:txBody>
+      </p:sp>
+      <p:sp>
+        <p:nvSpPr>
+          <p:cNvPr id="12" name="Shape 10"/>
+          <p:cNvSpPr/>
+          <p:nvPr/>
+        </p:nvSpPr>
+        <p:spPr>
+          <a:xfrm>
+            <a:off x="457200" y="3922776"/>
+            <a:ext cx="8229600" cy="868680"/>
+          </a:xfrm>
+          <a:prstGeom prst="roundRect">
+            <a:avLst>
+              <a:gd name="adj" fmla="val 8421"/>
+            </a:avLst>
+          </a:prstGeom>
+          <a:solidFill>
+            <a:srgbClr val="EEF2FF"/>
+          </a:solidFill>
+          <a:ln w="9525">
+            <a:solidFill>
+              <a:srgbClr val="C7D2FE"/>
+            </a:solidFill>
+            <a:prstDash val="solid"/>
+          </a:ln>
+        </p:spPr>
+      </p:sp>
+      <p:sp>
+        <p:nvSpPr>
+          <p:cNvPr id="13" name="Text 11"/>
+          <p:cNvSpPr txBox="1"/>
+          <p:nvPr/>
+        </p:nvSpPr>
+        <p:spPr>
+          <a:xfrm>
+            <a:off x="594360" y="3922776"/>
+            <a:ext cx="2743200" cy="868680"/>
+          </a:xfrm>
+          <a:prstGeom prst="rect">
+            <a:avLst/>
+          </a:prstGeom>
+          <a:noFill/>
+          <a:ln/>
+        </p:spPr>
+        <p:txBody>
+          <a:bodyPr wrap="square" lIns="0" tIns="0" rIns="0" bIns="0" rtlCol="0" anchor="ctr">
+            <a:normAutofit/>
+          </a:bodyPr>
+          <a:lstStyle/>
+          <a:p>
+            <a:pPr indent="0" marL="0">
+              <a:buNone/>
+            </a:pPr>
+            <a:r>
+              <a:rPr lang="en-US" sz="1400" b="1" dirty="0">
+                <a:solidFill>
+                  <a:srgbClr val="312E81"/>
+                </a:solidFill>
+              </a:rPr>
+              <a:t>4. Limite</a:t>
+            </a:r>
+            <a:endParaRPr lang="en-US" sz="1400" dirty="0"/>
+          </a:p>
+        </p:txBody>
+      </p:sp>
+      <p:sp>
+        <p:nvSpPr>
+          <p:cNvPr id="14" name="Text 12"/>
+          <p:cNvSpPr txBox="1"/>
+          <p:nvPr/>
+        </p:nvSpPr>
+        <p:spPr>
+          <a:xfrm>
+            <a:off x="3383280" y="3922776"/>
+            <a:ext cx="5212080" cy="868680"/>
+          </a:xfrm>
+          <a:prstGeom prst="rect">
+            <a:avLst/>
+          </a:prstGeom>
+          <a:noFill/>
+          <a:ln/>
+        </p:spPr>
+        <p:txBody>
+          <a:bodyPr wrap="square" lIns="0" tIns="0" rIns="0" bIns="0" rtlCol="0" anchor="ctr">
+            <a:normAutofit/>
+          </a:bodyPr>
+          <a:lstStyle/>
+          <a:p>
+            <a:pPr indent="0" marL="0">
+              <a:buNone/>
+            </a:pPr>
+            <a:r>
+              <a:rPr lang="en-US" sz="1700" dirty="0">
+                <a:solidFill>
+                  <a:srgbClr val="1F2937"/>
+                </a:solidFill>
+                <a:latin typeface="Cambria Math" pitchFamily="34" charset="0"/>
+                <a:ea typeface="Cambria Math" pitchFamily="34" charset="-122"/>
+                <a:cs typeface="Cambria Math" pitchFamily="34" charset="-120"/>
+              </a:rPr>
+              <a:t>|Δw(t)| ≤ μ |Δw(t−1)|,  μ = 1,75</a:t>
+            </a:r>
+            <a:endParaRPr lang="en-US" sz="1700" dirty="0"/>
           </a:p>
         </p:txBody>
       </p:sp>
@@ -3544,46 +5743,22 @@
                 <a:ea typeface="Calibri" pitchFamily="34" charset="-122"/>
                 <a:cs typeface="Calibri" pitchFamily="34" charset="-120"/>
               </a:rPr>
-              <a:t>Sensibilidade ao hiperparâmetro</a:t>
+              <a:t>Regras de segurança</a:t>
             </a:r>
             <a:endParaRPr lang="en-US" sz="2600" dirty="0"/>
           </a:p>
         </p:txBody>
       </p:sp>
-      <p:pic>
-        <p:nvPicPr>
-          <p:cNvPr id="3" name="Image 0" descr="O desempenho depende fortemente de ε e μ.">    </p:cNvPr>
-          <p:cNvPicPr>
-            <a:picLocks noChangeAspect="1"/>
-          </p:cNvPicPr>
-          <p:nvPr/>
-        </p:nvPicPr>
-        <p:blipFill>
-          <a:blip r:embed="rId1"/>
-          <a:stretch>
-            <a:fillRect/>
-          </a:stretch>
-        </p:blipFill>
-        <p:spPr>
-          <a:xfrm>
-            <a:off x="2124969" y="1005840"/>
-            <a:ext cx="4894061" cy="3154680"/>
-          </a:xfrm>
-          <a:prstGeom prst="rect">
-            <a:avLst/>
-          </a:prstGeom>
-        </p:spPr>
-      </p:pic>
-      <p:sp>
-        <p:nvSpPr>
-          <p:cNvPr id="4" name="Text 1"/>
+      <p:sp>
+        <p:nvSpPr>
+          <p:cNvPr id="3" name="Text 1"/>
           <p:cNvSpPr txBox="1"/>
           <p:nvPr/>
         </p:nvSpPr>
         <p:spPr>
           <a:xfrm>
-            <a:off x="457200" y="4251960"/>
-            <a:ext cx="8229600" cy="457200"/>
+            <a:off x="548640" y="1188720"/>
+            <a:ext cx="8046720" cy="3383280"/>
           </a:xfrm>
           <a:prstGeom prst="rect">
             <a:avLst/>
@@ -3597,18 +5772,76 @@
           </a:bodyPr>
           <a:lstStyle/>
           <a:p>
-            <a:pPr algn="ctr" indent="0" marL="0">
-              <a:buNone/>
-            </a:pPr>
-            <a:r>
-              <a:rPr lang="en-US" sz="1400" i="1" dirty="0">
-                <a:solidFill>
-                  <a:srgbClr val="4B5563"/>
-                </a:solidFill>
-              </a:rPr>
-              <a:t>O desempenho depende fortemente de ε e μ.</a:t>
-            </a:r>
-            <a:endParaRPr lang="en-US" sz="1400" dirty="0"/>
+            <a:pPr marL="342900" indent="-342900">
+              <a:spcAft>
+                <a:spcPts val="1400"/>
+              </a:spcAft>
+              <a:buSzPct val="100000"/>
+              <a:buChar char="•"/>
+            </a:pPr>
+            <a:r>
+              <a:rPr lang="en-US" sz="2400" dirty="0">
+                <a:solidFill>
+                  <a:srgbClr val="1F2937"/>
+                </a:solidFill>
+              </a:rPr>
+              <a:t>Se o passo anterior é nulo: usar o gradiente descendente (termo ε)</a:t>
+            </a:r>
+            <a:endParaRPr lang="en-US" sz="2400" dirty="0"/>
+          </a:p>
+          <a:p>
+            <a:pPr marL="342900" indent="-342900">
+              <a:spcAft>
+                <a:spcPts val="1400"/>
+              </a:spcAft>
+              <a:buSzPct val="100000"/>
+              <a:buChar char="•"/>
+            </a:pPr>
+            <a:r>
+              <a:rPr lang="en-US" sz="2400" dirty="0">
+                <a:solidFill>
+                  <a:srgbClr val="1F2937"/>
+                </a:solidFill>
+              </a:rPr>
+              <a:t>Se mesmo sinal e |S| diminuiu pouco: limitar por μ</a:t>
+            </a:r>
+            <a:endParaRPr lang="en-US" sz="2400" dirty="0"/>
+          </a:p>
+          <a:p>
+            <a:pPr marL="342900" indent="-342900">
+              <a:spcAft>
+                <a:spcPts val="1400"/>
+              </a:spcAft>
+              <a:buSzPct val="100000"/>
+              <a:buChar char="•"/>
+            </a:pPr>
+            <a:r>
+              <a:rPr lang="en-US" sz="2400" dirty="0">
+                <a:solidFill>
+                  <a:srgbClr val="1F2937"/>
+                </a:solidFill>
+              </a:rPr>
+              <a:t>Decaimento de pesos para controlar o crescimento</a:t>
+            </a:r>
+            <a:endParaRPr lang="en-US" sz="2400" dirty="0"/>
+          </a:p>
+          <a:p>
+            <a:pPr marL="342900" indent="-342900">
+              <a:spcAft>
+                <a:spcPts val="1400"/>
+              </a:spcAft>
+              <a:buSzPct val="100000"/>
+              <a:buChar char="•"/>
+            </a:pPr>
+            <a:r>
+              <a:rPr lang="en-US" sz="2400" dirty="0">
+                <a:solidFill>
+                  <a:srgbClr val="1F2937"/>
+                </a:solidFill>
+              </a:rPr>
+              <a:t>Artifício de Fahlman: somar 0,1 à derivada da sigmoide</a:t>
+            </a:r>
+            <a:endParaRPr lang="en-US" sz="2400" dirty="0"/>
           </a:p>
         </p:txBody>
       </p:sp>
@@ -3717,22 +5950,46 @@
                 <a:ea typeface="Calibri" pitchFamily="34" charset="-122"/>
                 <a:cs typeface="Calibri" pitchFamily="34" charset="-120"/>
               </a:rPr>
-              <a:t>Erros frequentes</a:t>
+              <a:t>Quickprop contra gradiente descendente</a:t>
             </a:r>
             <a:endParaRPr lang="en-US" sz="2600" dirty="0"/>
           </a:p>
         </p:txBody>
       </p:sp>
-      <p:sp>
-        <p:nvSpPr>
-          <p:cNvPr id="3" name="Text 1"/>
+      <p:pic>
+        <p:nvPicPr>
+          <p:cNvPr id="3" name="Image 0" descr="Mesma rede e inicialização; hiperparâmetros ajustados para cada um.">    </p:cNvPr>
+          <p:cNvPicPr>
+            <a:picLocks noChangeAspect="1"/>
+          </p:cNvPicPr>
+          <p:nvPr/>
+        </p:nvPicPr>
+        <p:blipFill>
+          <a:blip r:embed="rId1"/>
+          <a:stretch>
+            <a:fillRect/>
+          </a:stretch>
+        </p:blipFill>
+        <p:spPr>
+          <a:xfrm>
+            <a:off x="870593" y="1005840"/>
+            <a:ext cx="7402815" cy="3154680"/>
+          </a:xfrm>
+          <a:prstGeom prst="rect">
+            <a:avLst/>
+          </a:prstGeom>
+        </p:spPr>
+      </p:pic>
+      <p:sp>
+        <p:nvSpPr>
+          <p:cNvPr id="4" name="Text 1"/>
           <p:cNvSpPr txBox="1"/>
           <p:nvPr/>
         </p:nvSpPr>
         <p:spPr>
           <a:xfrm>
-            <a:off x="548640" y="1188720"/>
-            <a:ext cx="8046720" cy="3383280"/>
+            <a:off x="457200" y="4251960"/>
+            <a:ext cx="8229600" cy="457200"/>
           </a:xfrm>
           <a:prstGeom prst="rect">
             <a:avLst/>
@@ -3746,76 +6003,18 @@
           </a:bodyPr>
           <a:lstStyle/>
           <a:p>
-            <a:pPr marL="342900" indent="-342900">
-              <a:spcAft>
-                <a:spcPts val="1400"/>
-              </a:spcAft>
-              <a:buSzPct val="100000"/>
-              <a:buChar char="•"/>
-            </a:pPr>
-            <a:r>
-              <a:rPr lang="en-US" sz="2400" dirty="0">
-                <a:solidFill>
-                  <a:srgbClr val="1F2937"/>
-                </a:solidFill>
-              </a:rPr>
-              <a:t>Dividir por zero quando S(t) = S(t−1)</a:t>
-            </a:r>
-            <a:endParaRPr lang="en-US" sz="2400" dirty="0"/>
-          </a:p>
-          <a:p>
-            <a:pPr marL="342900" indent="-342900">
-              <a:spcAft>
-                <a:spcPts val="1400"/>
-              </a:spcAft>
-              <a:buSzPct val="100000"/>
-              <a:buChar char="•"/>
-            </a:pPr>
-            <a:r>
-              <a:rPr lang="en-US" sz="2400" dirty="0">
-                <a:solidFill>
-                  <a:srgbClr val="1F2937"/>
-                </a:solidFill>
-              </a:rPr>
-              <a:t>Esquecer o limite μ</a:t>
-            </a:r>
-            <a:endParaRPr lang="en-US" sz="2400" dirty="0"/>
-          </a:p>
-          <a:p>
-            <a:pPr marL="342900" indent="-342900">
-              <a:spcAft>
-                <a:spcPts val="1400"/>
-              </a:spcAft>
-              <a:buSzPct val="100000"/>
-              <a:buChar char="•"/>
-            </a:pPr>
-            <a:r>
-              <a:rPr lang="en-US" sz="2400" dirty="0">
-                <a:solidFill>
-                  <a:srgbClr val="1F2937"/>
-                </a:solidFill>
-              </a:rPr>
-              <a:t>Comparar com GD sem ajustar a taxa do GD</a:t>
-            </a:r>
-            <a:endParaRPr lang="en-US" sz="2400" dirty="0"/>
-          </a:p>
-          <a:p>
-            <a:pPr marL="342900" indent="-342900">
-              <a:spcAft>
-                <a:spcPts val="1400"/>
-              </a:spcAft>
-              <a:buSzPct val="100000"/>
-              <a:buChar char="•"/>
-            </a:pPr>
-            <a:r>
-              <a:rPr lang="en-US" sz="2400" dirty="0">
-                <a:solidFill>
-                  <a:srgbClr val="1F2937"/>
-                </a:solidFill>
-              </a:rPr>
-              <a:t>Aplicar o artifício +0,1 à derivada usada na verificação de gradiente</a:t>
-            </a:r>
-            <a:endParaRPr lang="en-US" sz="2400" dirty="0"/>
+            <a:pPr algn="ctr" indent="0" marL="0">
+              <a:buNone/>
+            </a:pPr>
+            <a:r>
+              <a:rPr lang="en-US" sz="1400" i="1" dirty="0">
+                <a:solidFill>
+                  <a:srgbClr val="4B5563"/>
+                </a:solidFill>
+              </a:rPr>
+              <a:t>Mesma rede e inicialização; hiperparâmetros ajustados para cada um.</a:t>
+            </a:r>
+            <a:endParaRPr lang="en-US" sz="1400" dirty="0"/>
           </a:p>
         </p:txBody>
       </p:sp>
@@ -3924,85 +6123,46 @@
                 <a:ea typeface="Calibri" pitchFamily="34" charset="-122"/>
                 <a:cs typeface="Calibri" pitchFamily="34" charset="-120"/>
               </a:rPr>
-              <a:t>Atividade</a:t>
+              <a:t>Sensibilidade ao hiperparâmetro</a:t>
             </a:r>
             <a:endParaRPr lang="en-US" sz="2600" dirty="0"/>
           </a:p>
         </p:txBody>
       </p:sp>
-      <p:sp>
-        <p:nvSpPr>
-          <p:cNvPr id="3" name="Shape 1"/>
-          <p:cNvSpPr/>
-          <p:nvPr/>
-        </p:nvSpPr>
-        <p:spPr>
-          <a:xfrm>
-            <a:off x="548640" y="1188720"/>
-            <a:ext cx="8046720" cy="3108960"/>
-          </a:xfrm>
-          <a:prstGeom prst="roundRect">
-            <a:avLst>
-              <a:gd name="adj" fmla="val 3529"/>
-            </a:avLst>
-          </a:prstGeom>
-          <a:solidFill>
-            <a:srgbClr val="FFFBEB"/>
-          </a:solidFill>
-          <a:ln w="25400">
-            <a:solidFill>
-              <a:srgbClr val="F59E0B"/>
-            </a:solidFill>
-            <a:prstDash val="solid"/>
-          </a:ln>
-        </p:spPr>
-      </p:sp>
-      <p:sp>
-        <p:nvSpPr>
-          <p:cNvPr id="4" name="Text 2"/>
+      <p:pic>
+        <p:nvPicPr>
+          <p:cNvPr id="3" name="Image 0" descr="O desempenho depende fortemente de ε e μ.">    </p:cNvPr>
+          <p:cNvPicPr>
+            <a:picLocks noChangeAspect="1"/>
+          </p:cNvPicPr>
+          <p:nvPr/>
+        </p:nvPicPr>
+        <p:blipFill>
+          <a:blip r:embed="rId1"/>
+          <a:stretch>
+            <a:fillRect/>
+          </a:stretch>
+        </p:blipFill>
+        <p:spPr>
+          <a:xfrm>
+            <a:off x="2124969" y="1005840"/>
+            <a:ext cx="4894061" cy="3154680"/>
+          </a:xfrm>
+          <a:prstGeom prst="rect">
+            <a:avLst/>
+          </a:prstGeom>
+        </p:spPr>
+      </p:pic>
+      <p:sp>
+        <p:nvSpPr>
+          <p:cNvPr id="4" name="Text 1"/>
           <p:cNvSpPr txBox="1"/>
           <p:nvPr/>
         </p:nvSpPr>
         <p:spPr>
           <a:xfrm>
-            <a:off x="822960" y="1325880"/>
-            <a:ext cx="3657600" cy="365760"/>
-          </a:xfrm>
-          <a:prstGeom prst="rect">
-            <a:avLst/>
-          </a:prstGeom>
-          <a:noFill/>
-          <a:ln/>
-        </p:spPr>
-        <p:txBody>
-          <a:bodyPr wrap="square" lIns="0" tIns="0" rIns="0" bIns="0" rtlCol="0" anchor="ctr"/>
-          <a:lstStyle/>
-          <a:p>
-            <a:pPr indent="0" marL="0">
-              <a:buNone/>
-            </a:pPr>
-            <a:r>
-              <a:rPr lang="en-US" sz="1400" b="1" spc="300" kern="0" dirty="0">
-                <a:solidFill>
-                  <a:srgbClr val="B45309"/>
-                </a:solidFill>
-              </a:rPr>
-              <a:t>MÃO NA MASSA</a:t>
-            </a:r>
-            <a:endParaRPr lang="en-US" sz="1400" dirty="0"/>
-          </a:p>
-        </p:txBody>
-      </p:sp>
-      <p:sp>
-        <p:nvSpPr>
-          <p:cNvPr id="5" name="Text 3"/>
-          <p:cNvSpPr txBox="1"/>
-          <p:nvPr/>
-        </p:nvSpPr>
-        <p:spPr>
-          <a:xfrm>
-            <a:off x="822960" y="1783080"/>
-            <a:ext cx="7498080" cy="2377440"/>
+            <a:off x="457200" y="4251960"/>
+            <a:ext cx="8229600" cy="457200"/>
           </a:xfrm>
           <a:prstGeom prst="rect">
             <a:avLst/>
@@ -4016,18 +6176,18 @@
           </a:bodyPr>
           <a:lstStyle/>
           <a:p>
-            <a:pPr indent="0" marL="0">
+            <a:pPr algn="ctr" indent="0" marL="0">
               <a:buNone/>
             </a:pPr>
             <a:r>
-              <a:rPr lang="en-US" sz="2100" dirty="0">
-                <a:solidFill>
-                  <a:srgbClr val="1F2937"/>
-                </a:solidFill>
-              </a:rPr>
-              <a:t>Para E(w) = (w−2)², com w(0) = 0 e w(1) = 0,5, e gradientes S = 2(w−2): calcule o próximo passo do Quickprop. Ele é limitado por μ = 1,75?</a:t>
-            </a:r>
-            <a:endParaRPr lang="en-US" sz="2100" dirty="0"/>
+              <a:rPr lang="en-US" sz="1400" i="1" dirty="0">
+                <a:solidFill>
+                  <a:srgbClr val="4B5563"/>
+                </a:solidFill>
+              </a:rPr>
+              <a:t>O desempenho depende fortemente de ε e μ.</a:t>
+            </a:r>
+            <a:endParaRPr lang="en-US" sz="1400" dirty="0"/>
           </a:p>
         </p:txBody>
       </p:sp>
